--- a/3.3 Hoofdstuk 3 - Overheid/3.3.3 Paragraaf 3 - Collectieve goederen/2. Leren/3.3.3 Collectieve goederen – presentatie.pptx
+++ b/3.3 Hoofdstuk 3 - Overheid/3.3.3 Paragraaf 3 - Collectieve goederen/2. Leren/3.3.3 Collectieve goederen – presentatie.pptx
@@ -1879,6 +1879,8 @@
               </a:rPr>
               <a:t>De twee eigenschappen van een collectief goed benoemen</a:t>
             </a:r>
+          </a:p>
+          <a:p>
             <a:pPr algn="l" marL="342900" indent="-342900">
               <a:lnSpc>
                 <a:spcPct val="150000"/>
@@ -1900,6 +1902,8 @@
               </a:rPr>
               <a:t>Herkennen of iets een collectief goed is</a:t>
             </a:r>
+          </a:p>
+          <a:p>
             <a:pPr algn="l" marL="342900" indent="-342900">
               <a:lnSpc>
                 <a:spcPct val="150000"/>
@@ -1921,6 +1925,8 @@
               </a:rPr>
               <a:t>Uitleggen waarom de markt collectieve goederen niet levert</a:t>
             </a:r>
+          </a:p>
+          <a:p>
             <a:pPr algn="l" marL="342900" indent="-342900">
               <a:lnSpc>
                 <a:spcPct val="150000"/>
@@ -1942,7 +1948,6 @@
               </a:rPr>
               <a:t>Het meeliftgedrag verklaren</a:t>
             </a:r>
-            <a:endParaRPr lang="en-US" sz="1500" dirty="0"/>
           </a:p>
         </p:txBody>
       </p:sp>
@@ -2038,6 +2043,10 @@
             </a:outerShdw>
           </a:effectLst>
         </p:spPr>
+        <p:txBody>
+          <a:bodyPr/>
+          <a:p/>
+        </p:txBody>
       </p:sp>
       <p:sp>
         <p:nvSpPr>
@@ -2058,6 +2067,10 @@
           </a:solidFill>
           <a:ln/>
         </p:spPr>
+        <p:txBody>
+          <a:bodyPr/>
+          <a:p/>
+        </p:txBody>
       </p:sp>
       <p:sp>
         <p:nvSpPr>
@@ -2186,6 +2199,10 @@
             </a:outerShdw>
           </a:effectLst>
         </p:spPr>
+        <p:txBody>
+          <a:bodyPr/>
+          <a:p/>
+        </p:txBody>
       </p:sp>
       <p:sp>
         <p:nvSpPr>
@@ -2206,6 +2223,10 @@
           </a:solidFill>
           <a:ln/>
         </p:spPr>
+        <p:txBody>
+          <a:bodyPr/>
+          <a:p/>
+        </p:txBody>
       </p:sp>
       <p:sp>
         <p:nvSpPr>
@@ -2327,6 +2348,10 @@
           </a:solidFill>
           <a:ln/>
         </p:spPr>
+        <p:txBody>
+          <a:bodyPr/>
+          <a:p/>
+        </p:txBody>
       </p:sp>
       <p:sp>
         <p:nvSpPr>
@@ -2347,6 +2372,10 @@
           </a:solidFill>
           <a:ln/>
         </p:spPr>
+        <p:txBody>
+          <a:bodyPr/>
+          <a:p/>
+        </p:txBody>
       </p:sp>
       <p:sp>
         <p:nvSpPr>
@@ -2479,6 +2508,10 @@
             </a:outerShdw>
           </a:effectLst>
         </p:spPr>
+        <p:txBody>
+          <a:bodyPr/>
+          <a:p/>
+        </p:txBody>
       </p:sp>
       <p:sp>
         <p:nvSpPr>
@@ -2499,6 +2532,10 @@
           </a:solidFill>
           <a:ln/>
         </p:spPr>
+        <p:txBody>
+          <a:bodyPr/>
+          <a:p/>
+        </p:txBody>
       </p:sp>
       <p:sp>
         <p:nvSpPr>
@@ -2700,6 +2737,10 @@
             </a:outerShdw>
           </a:effectLst>
         </p:spPr>
+        <p:txBody>
+          <a:bodyPr/>
+          <a:p/>
+        </p:txBody>
       </p:sp>
       <p:sp>
         <p:nvSpPr>
@@ -2720,6 +2761,10 @@
           </a:solidFill>
           <a:ln/>
         </p:spPr>
+        <p:txBody>
+          <a:bodyPr/>
+          <a:p/>
+        </p:txBody>
       </p:sp>
       <p:sp>
         <p:nvSpPr>
@@ -3028,6 +3073,10 @@
             </a:outerShdw>
           </a:effectLst>
         </p:spPr>
+        <p:txBody>
+          <a:bodyPr/>
+          <a:p/>
+        </p:txBody>
       </p:sp>
       <p:sp>
         <p:nvSpPr>
@@ -3096,6 +3145,10 @@
             </a:outerShdw>
           </a:effectLst>
         </p:spPr>
+        <p:txBody>
+          <a:bodyPr/>
+          <a:p/>
+        </p:txBody>
       </p:sp>
       <p:sp>
         <p:nvSpPr>
@@ -3164,6 +3217,10 @@
             </a:outerShdw>
           </a:effectLst>
         </p:spPr>
+        <p:txBody>
+          <a:bodyPr/>
+          <a:p/>
+        </p:txBody>
       </p:sp>
       <p:sp>
         <p:nvSpPr>
@@ -3232,6 +3289,10 @@
             </a:outerShdw>
           </a:effectLst>
         </p:spPr>
+        <p:txBody>
+          <a:bodyPr/>
+          <a:p/>
+        </p:txBody>
       </p:sp>
       <p:sp>
         <p:nvSpPr>
@@ -3300,6 +3361,10 @@
             </a:outerShdw>
           </a:effectLst>
         </p:spPr>
+        <p:txBody>
+          <a:bodyPr/>
+          <a:p/>
+        </p:txBody>
       </p:sp>
       <p:sp>
         <p:nvSpPr>
@@ -3320,6 +3385,10 @@
           </a:solidFill>
           <a:ln/>
         </p:spPr>
+        <p:txBody>
+          <a:bodyPr/>
+          <a:p/>
+        </p:txBody>
       </p:sp>
       <p:sp>
         <p:nvSpPr>
@@ -3452,6 +3521,10 @@
             </a:outerShdw>
           </a:effectLst>
         </p:spPr>
+        <p:txBody>
+          <a:bodyPr/>
+          <a:p/>
+        </p:txBody>
       </p:sp>
       <p:sp>
         <p:nvSpPr>
@@ -3520,6 +3593,10 @@
             </a:outerShdw>
           </a:effectLst>
         </p:spPr>
+        <p:txBody>
+          <a:bodyPr/>
+          <a:p/>
+        </p:txBody>
       </p:sp>
       <p:sp>
         <p:nvSpPr>
@@ -3588,6 +3665,10 @@
             </a:outerShdw>
           </a:effectLst>
         </p:spPr>
+        <p:txBody>
+          <a:bodyPr/>
+          <a:p/>
+        </p:txBody>
       </p:sp>
       <p:sp>
         <p:nvSpPr>
@@ -3656,6 +3737,10 @@
             </a:outerShdw>
           </a:effectLst>
         </p:spPr>
+        <p:txBody>
+          <a:bodyPr/>
+          <a:p/>
+        </p:txBody>
       </p:sp>
       <p:sp>
         <p:nvSpPr>
@@ -3724,6 +3809,10 @@
             </a:outerShdw>
           </a:effectLst>
         </p:spPr>
+        <p:txBody>
+          <a:bodyPr/>
+          <a:p/>
+        </p:txBody>
       </p:sp>
       <p:sp>
         <p:nvSpPr>
@@ -3856,6 +3945,10 @@
             </a:outerShdw>
           </a:effectLst>
         </p:spPr>
+        <p:txBody>
+          <a:bodyPr/>
+          <a:p/>
+        </p:txBody>
       </p:sp>
       <p:sp>
         <p:nvSpPr>
@@ -3924,6 +4017,10 @@
             </a:outerShdw>
           </a:effectLst>
         </p:spPr>
+        <p:txBody>
+          <a:bodyPr/>
+          <a:p/>
+        </p:txBody>
       </p:sp>
       <p:sp>
         <p:nvSpPr>
@@ -3992,6 +4089,10 @@
             </a:outerShdw>
           </a:effectLst>
         </p:spPr>
+        <p:txBody>
+          <a:bodyPr/>
+          <a:p/>
+        </p:txBody>
       </p:sp>
       <p:sp>
         <p:nvSpPr>
@@ -4060,6 +4161,10 @@
             </a:outerShdw>
           </a:effectLst>
         </p:spPr>
+        <p:txBody>
+          <a:bodyPr/>
+          <a:p/>
+        </p:txBody>
       </p:sp>
       <p:sp>
         <p:nvSpPr>
@@ -4128,6 +4233,10 @@
             </a:outerShdw>
           </a:effectLst>
         </p:spPr>
+        <p:txBody>
+          <a:bodyPr/>
+          <a:p/>
+        </p:txBody>
       </p:sp>
       <p:sp>
         <p:nvSpPr>
@@ -4148,6 +4257,10 @@
           </a:solidFill>
           <a:ln/>
         </p:spPr>
+        <p:txBody>
+          <a:bodyPr/>
+          <a:p/>
+        </p:txBody>
       </p:sp>
       <p:sp>
         <p:nvSpPr>
@@ -4347,6 +4460,8 @@
               </a:rPr>
               <a:t>Collectief goed = niet-uitsluitbaar + niet-rivaliserend</a:t>
             </a:r>
+          </a:p>
+          <a:p>
             <a:pPr algn="l" marL="342900" indent="-342900">
               <a:lnSpc>
                 <a:spcPct val="160000"/>
@@ -4368,6 +4483,8 @@
               </a:rPr>
               <a:t>Particuliere aanbieder kan er geen winst mee maken</a:t>
             </a:r>
+          </a:p>
+          <a:p>
             <a:pPr algn="l" marL="342900" indent="-342900">
               <a:lnSpc>
                 <a:spcPct val="160000"/>
@@ -4389,6 +4506,8 @@
               </a:rPr>
               <a:t>Meeliftgedrag: niemand wil als enige betalen</a:t>
             </a:r>
+          </a:p>
+          <a:p>
             <a:pPr algn="l" marL="342900" indent="-342900">
               <a:lnSpc>
                 <a:spcPct val="160000"/>
@@ -4410,6 +4529,8 @@
               </a:rPr>
               <a:t>De overheid biedt collectieve goederen aan</a:t>
             </a:r>
+          </a:p>
+          <a:p>
             <a:pPr algn="l" marL="342900" indent="-342900">
               <a:lnSpc>
                 <a:spcPct val="160000"/>
@@ -4431,7 +4552,6 @@
               </a:rPr>
               <a:t>Betaling gaat via verplichte belastingheffing</a:t>
             </a:r>
-            <a:endParaRPr lang="en-US" sz="1500" dirty="0"/>
           </a:p>
         </p:txBody>
       </p:sp>

--- a/3.3 Hoofdstuk 3 - Overheid/3.3.3 Paragraaf 3 - Collectieve goederen/2. Leren/3.3.3 Collectieve goederen – presentatie.pptx
+++ b/3.3 Hoofdstuk 3 - Overheid/3.3.3 Paragraaf 3 - Collectieve goederen/2. Leren/3.3.3 Collectieve goederen – presentatie.pptx
@@ -13,9 +13,14 @@
     <p:sldId id="261" r:id="rId7"/>
     <p:sldId id="262" r:id="rId8"/>
     <p:sldId id="263" r:id="rId9"/>
+    <p:sldId id="264" r:id="rId10"/>
+    <p:sldId id="265" r:id="rId11"/>
+    <p:sldId id="266" r:id="rId12"/>
+    <p:sldId id="267" r:id="rId13"/>
+    <p:sldId id="268" r:id="rId14"/>
   </p:sldIdLst>
   <p:notesMasterIdLst>
-    <p:notesMasterId r:id="rId10"/>
+    <p:notesMasterId r:id="rId15"/>
   </p:notesMasterIdLst>
   <p:sldSz cx="9144000" cy="5143500"/>
   <p:notesSz cx="5143500" cy="9144000"/>
@@ -509,7 +514,7 @@
           <a:p>
             <a:r>
               <a:rPr lang="en-US" dirty="0"/>
-              <a:t>Welkom bij paragraaf 3.3.3 over collectieve goederen. Dit zijn goederen die de markt niet kan leveren vanwege twee bijzondere eigenschappen: niet-uitsluitbaarheid en niet-rivaliteit.</a:t>
+              <a:t>Deze paragraaf behandelt één specifieke vorm van marktfalen: goederen die de markt niet levert. Dijken, defensie, straatverlichting. Waarom niet? En wie lost het op?</a:t>
             </a:r>
             <a:endParaRPr lang="en-US" dirty="0"/>
           </a:p>
@@ -533,6 +538,358 @@
             <a:fld id="{F7021451-1387-4CA6-816F-3879F97B5CBC}" type="slidenum">
               <a:rPr lang="en-US"/>
               <a:t>1</a:t>
+            </a:fld>
+            <a:endParaRPr lang="en-US"/>
+          </a:p>
+        </p:txBody>
+      </p:sp>
+    </p:spTree>
+    <p:extLst>
+      <p:ext uri="{BB962C8B-B14F-4D97-AF65-F5344CB8AC3E}">
+        <p14:creationId xmlns:p14="http://schemas.microsoft.com/office/powerpoint/2010/main" val="1024086991"/>
+      </p:ext>
+    </p:extLst>
+  </p:cSld>
+  <p:clrMapOvr>
+    <a:masterClrMapping/>
+  </p:clrMapOvr>
+</p:notes>
+</file>
+
+<file path=ppt/notesSlides/notesSlide10.xml><?xml version="1.0" encoding="utf-8"?>
+<p:notes xmlns:a="http://schemas.openxmlformats.org/drawingml/2006/main" xmlns:r="http://schemas.openxmlformats.org/officeDocument/2006/relationships" xmlns:p="http://schemas.openxmlformats.org/presentationml/2006/main">
+  <p:cSld>
+    <p:spTree>
+      <p:nvGrpSpPr>
+        <p:cNvPr id="1" name=""/>
+        <p:cNvGrpSpPr/>
+        <p:nvPr/>
+      </p:nvGrpSpPr>
+      <p:grpSpPr>
+        <a:xfrm>
+          <a:off x="0" y="0"/>
+          <a:ext cx="0" cy="0"/>
+          <a:chOff x="0" y="0"/>
+          <a:chExt cx="0" cy="0"/>
+        </a:xfrm>
+      </p:grpSpPr>
+      <p:sp>
+        <p:nvSpPr>
+          <p:cNvPr id="2" name="Slide Image Placeholder 1"/>
+          <p:cNvSpPr>
+            <a:spLocks noGrp="1" noRot="1" noChangeAspect="1"/>
+          </p:cNvSpPr>
+          <p:nvPr>
+            <p:ph type="sldImg"/>
+          </p:nvPr>
+        </p:nvSpPr>
+        <p:spPr/>
+      </p:sp>
+      <p:sp>
+        <p:nvSpPr>
+          <p:cNvPr id="3" name="Notes Placeholder 2"/>
+          <p:cNvSpPr>
+            <a:spLocks noGrp="1"/>
+          </p:cNvSpPr>
+          <p:nvPr>
+            <p:ph type="body" idx="1"/>
+          </p:nvPr>
+        </p:nvSpPr>
+        <p:spPr/>
+        <p:txBody>
+          <a:bodyPr/>
+          <a:lstStyle/>
+          <a:p>
+            <a:r>
+              <a:rPr lang="en-US" dirty="0"/>
+              <a:t>Links het probleem, rechts de oplossing. De sleutel is VERPLICHTE belasting: de overheid kan iedereen laten meebetalen — een particuliere aanbieder kan dat niet.</a:t>
+            </a:r>
+            <a:endParaRPr lang="en-US" dirty="0"/>
+          </a:p>
+        </p:txBody>
+      </p:sp>
+      <p:sp>
+        <p:nvSpPr>
+          <p:cNvPr id="4" name="Slide Number Placeholder 3"/>
+          <p:cNvSpPr>
+            <a:spLocks noGrp="1"/>
+          </p:cNvSpPr>
+          <p:nvPr>
+            <p:ph type="sldNum" sz="quarter" idx="10"/>
+          </p:nvPr>
+        </p:nvSpPr>
+        <p:spPr/>
+        <p:txBody>
+          <a:bodyPr/>
+          <a:lstStyle/>
+          <a:p>
+            <a:fld id="{F7021451-1387-4CA6-816F-3879F97B5CBC}" type="slidenum">
+              <a:rPr lang="en-US"/>
+              <a:t>10</a:t>
+            </a:fld>
+            <a:endParaRPr lang="en-US"/>
+          </a:p>
+        </p:txBody>
+      </p:sp>
+    </p:spTree>
+    <p:extLst>
+      <p:ext uri="{BB962C8B-B14F-4D97-AF65-F5344CB8AC3E}">
+        <p14:creationId xmlns:p14="http://schemas.microsoft.com/office/powerpoint/2010/main" val="1024086991"/>
+      </p:ext>
+    </p:extLst>
+  </p:cSld>
+  <p:clrMapOvr>
+    <a:masterClrMapping/>
+  </p:clrMapOvr>
+</p:notes>
+</file>
+
+<file path=ppt/notesSlides/notesSlide11.xml><?xml version="1.0" encoding="utf-8"?>
+<p:notes xmlns:a="http://schemas.openxmlformats.org/drawingml/2006/main" xmlns:r="http://schemas.openxmlformats.org/officeDocument/2006/relationships" xmlns:p="http://schemas.openxmlformats.org/presentationml/2006/main">
+  <p:cSld>
+    <p:spTree>
+      <p:nvGrpSpPr>
+        <p:cNvPr id="1" name=""/>
+        <p:cNvGrpSpPr/>
+        <p:nvPr/>
+      </p:nvGrpSpPr>
+      <p:grpSpPr>
+        <a:xfrm>
+          <a:off x="0" y="0"/>
+          <a:ext cx="0" cy="0"/>
+          <a:chOff x="0" y="0"/>
+          <a:chExt cx="0" cy="0"/>
+        </a:xfrm>
+      </p:grpSpPr>
+      <p:sp>
+        <p:nvSpPr>
+          <p:cNvPr id="2" name="Slide Image Placeholder 1"/>
+          <p:cNvSpPr>
+            <a:spLocks noGrp="1" noRot="1" noChangeAspect="1"/>
+          </p:cNvSpPr>
+          <p:nvPr>
+            <p:ph type="sldImg"/>
+          </p:nvPr>
+        </p:nvSpPr>
+        <p:spPr/>
+      </p:sp>
+      <p:sp>
+        <p:nvSpPr>
+          <p:cNvPr id="3" name="Notes Placeholder 2"/>
+          <p:cNvSpPr>
+            <a:spLocks noGrp="1"/>
+          </p:cNvSpPr>
+          <p:nvPr>
+            <p:ph type="body" idx="1"/>
+          </p:nvPr>
+        </p:nvSpPr>
+        <p:spPr/>
+        <p:txBody>
+          <a:bodyPr/>
+          <a:lstStyle/>
+          <a:p>
+            <a:r>
+              <a:rPr lang="en-US" dirty="0"/>
+              <a:t>Verplichte belasting is het sleutelmechanisme. Omdat niemand kan ontsnappen, verdwijnt het free-riderprobleem.</a:t>
+            </a:r>
+            <a:endParaRPr lang="en-US" dirty="0"/>
+          </a:p>
+        </p:txBody>
+      </p:sp>
+      <p:sp>
+        <p:nvSpPr>
+          <p:cNvPr id="4" name="Slide Number Placeholder 3"/>
+          <p:cNvSpPr>
+            <a:spLocks noGrp="1"/>
+          </p:cNvSpPr>
+          <p:nvPr>
+            <p:ph type="sldNum" sz="quarter" idx="10"/>
+          </p:nvPr>
+        </p:nvSpPr>
+        <p:spPr/>
+        <p:txBody>
+          <a:bodyPr/>
+          <a:lstStyle/>
+          <a:p>
+            <a:fld id="{F7021451-1387-4CA6-816F-3879F97B5CBC}" type="slidenum">
+              <a:rPr lang="en-US"/>
+              <a:t>11</a:t>
+            </a:fld>
+            <a:endParaRPr lang="en-US"/>
+          </a:p>
+        </p:txBody>
+      </p:sp>
+    </p:spTree>
+    <p:extLst>
+      <p:ext uri="{BB962C8B-B14F-4D97-AF65-F5344CB8AC3E}">
+        <p14:creationId xmlns:p14="http://schemas.microsoft.com/office/powerpoint/2010/main" val="1024086991"/>
+      </p:ext>
+    </p:extLst>
+  </p:cSld>
+  <p:clrMapOvr>
+    <a:masterClrMapping/>
+  </p:clrMapOvr>
+</p:notes>
+</file>
+
+<file path=ppt/notesSlides/notesSlide12.xml><?xml version="1.0" encoding="utf-8"?>
+<p:notes xmlns:a="http://schemas.openxmlformats.org/drawingml/2006/main" xmlns:r="http://schemas.openxmlformats.org/officeDocument/2006/relationships" xmlns:p="http://schemas.openxmlformats.org/presentationml/2006/main">
+  <p:cSld>
+    <p:spTree>
+      <p:nvGrpSpPr>
+        <p:cNvPr id="1" name=""/>
+        <p:cNvGrpSpPr/>
+        <p:nvPr/>
+      </p:nvGrpSpPr>
+      <p:grpSpPr>
+        <a:xfrm>
+          <a:off x="0" y="0"/>
+          <a:ext cx="0" cy="0"/>
+          <a:chOff x="0" y="0"/>
+          <a:chExt cx="0" cy="0"/>
+        </a:xfrm>
+      </p:grpSpPr>
+      <p:sp>
+        <p:nvSpPr>
+          <p:cNvPr id="2" name="Slide Image Placeholder 1"/>
+          <p:cNvSpPr>
+            <a:spLocks noGrp="1" noRot="1" noChangeAspect="1"/>
+          </p:cNvSpPr>
+          <p:nvPr>
+            <p:ph type="sldImg"/>
+          </p:nvPr>
+        </p:nvSpPr>
+        <p:spPr/>
+      </p:sp>
+      <p:sp>
+        <p:nvSpPr>
+          <p:cNvPr id="3" name="Notes Placeholder 2"/>
+          <p:cNvSpPr>
+            <a:spLocks noGrp="1"/>
+          </p:cNvSpPr>
+          <p:nvPr>
+            <p:ph type="body" idx="1"/>
+          </p:nvPr>
+        </p:nvSpPr>
+        <p:spPr/>
+        <p:txBody>
+          <a:bodyPr/>
+          <a:lstStyle/>
+          <a:p>
+            <a:r>
+              <a:rPr lang="en-US" dirty="0"/>
+              <a:t>Valkuil 1 is de klassieker: leerlingen verwarren ‘door de overheid geleverd’ met ‘collectief goed’. Het is een eigenschap van het GOED, niet van de aanbieder.</a:t>
+            </a:r>
+            <a:endParaRPr lang="en-US" dirty="0"/>
+          </a:p>
+        </p:txBody>
+      </p:sp>
+      <p:sp>
+        <p:nvSpPr>
+          <p:cNvPr id="4" name="Slide Number Placeholder 3"/>
+          <p:cNvSpPr>
+            <a:spLocks noGrp="1"/>
+          </p:cNvSpPr>
+          <p:nvPr>
+            <p:ph type="sldNum" sz="quarter" idx="10"/>
+          </p:nvPr>
+        </p:nvSpPr>
+        <p:spPr/>
+        <p:txBody>
+          <a:bodyPr/>
+          <a:lstStyle/>
+          <a:p>
+            <a:fld id="{F7021451-1387-4CA6-816F-3879F97B5CBC}" type="slidenum">
+              <a:rPr lang="en-US"/>
+              <a:t>12</a:t>
+            </a:fld>
+            <a:endParaRPr lang="en-US"/>
+          </a:p>
+        </p:txBody>
+      </p:sp>
+    </p:spTree>
+    <p:extLst>
+      <p:ext uri="{BB962C8B-B14F-4D97-AF65-F5344CB8AC3E}">
+        <p14:creationId xmlns:p14="http://schemas.microsoft.com/office/powerpoint/2010/main" val="1024086991"/>
+      </p:ext>
+    </p:extLst>
+  </p:cSld>
+  <p:clrMapOvr>
+    <a:masterClrMapping/>
+  </p:clrMapOvr>
+</p:notes>
+</file>
+
+<file path=ppt/notesSlides/notesSlide13.xml><?xml version="1.0" encoding="utf-8"?>
+<p:notes xmlns:a="http://schemas.openxmlformats.org/drawingml/2006/main" xmlns:r="http://schemas.openxmlformats.org/officeDocument/2006/relationships" xmlns:p="http://schemas.openxmlformats.org/presentationml/2006/main">
+  <p:cSld>
+    <p:spTree>
+      <p:nvGrpSpPr>
+        <p:cNvPr id="1" name=""/>
+        <p:cNvGrpSpPr/>
+        <p:nvPr/>
+      </p:nvGrpSpPr>
+      <p:grpSpPr>
+        <a:xfrm>
+          <a:off x="0" y="0"/>
+          <a:ext cx="0" cy="0"/>
+          <a:chOff x="0" y="0"/>
+          <a:chExt cx="0" cy="0"/>
+        </a:xfrm>
+      </p:grpSpPr>
+      <p:sp>
+        <p:nvSpPr>
+          <p:cNvPr id="2" name="Slide Image Placeholder 1"/>
+          <p:cNvSpPr>
+            <a:spLocks noGrp="1" noRot="1" noChangeAspect="1"/>
+          </p:cNvSpPr>
+          <p:nvPr>
+            <p:ph type="sldImg"/>
+          </p:nvPr>
+        </p:nvSpPr>
+        <p:spPr/>
+      </p:sp>
+      <p:sp>
+        <p:nvSpPr>
+          <p:cNvPr id="3" name="Notes Placeholder 2"/>
+          <p:cNvSpPr>
+            <a:spLocks noGrp="1"/>
+          </p:cNvSpPr>
+          <p:nvPr>
+            <p:ph type="body" idx="1"/>
+          </p:nvPr>
+        </p:nvSpPr>
+        <p:spPr/>
+        <p:txBody>
+          <a:bodyPr/>
+          <a:lstStyle/>
+          <a:p>
+            <a:r>
+              <a:rPr lang="en-US" dirty="0"/>
+              <a:t>Retrieval-opdracht: laat leerlingen de 2×2 matrix op een leeg blad natekenen en een eigen voorbeeld in elk vak schrijven. Die oefening legt beide eigenschappen tegelijk vast.</a:t>
+            </a:r>
+            <a:endParaRPr lang="en-US" dirty="0"/>
+          </a:p>
+        </p:txBody>
+      </p:sp>
+      <p:sp>
+        <p:nvSpPr>
+          <p:cNvPr id="4" name="Slide Number Placeholder 3"/>
+          <p:cNvSpPr>
+            <a:spLocks noGrp="1"/>
+          </p:cNvSpPr>
+          <p:nvPr>
+            <p:ph type="sldNum" sz="quarter" idx="10"/>
+          </p:nvPr>
+        </p:nvSpPr>
+        <p:spPr/>
+        <p:txBody>
+          <a:bodyPr/>
+          <a:lstStyle/>
+          <a:p>
+            <a:fld id="{F7021451-1387-4CA6-816F-3879F97B5CBC}" type="slidenum">
+              <a:rPr lang="en-US"/>
+              <a:t>13</a:t>
             </a:fld>
             <a:endParaRPr lang="en-US"/>
           </a:p>
@@ -597,7 +954,7 @@
           <a:p>
             <a:r>
               <a:rPr lang="en-US" dirty="0"/>
-              <a:t>Vier leerdoelen. Het draait om twee eigenschappen, het herkennen van collectieve goederen, en het begrijpen waarom de markt ze niet levert.</a:t>
+              <a:t>Benadruk dat de 2×2 matrix (komt zo) de kern van deze paragraaf is: als je de matrix kunt invullen, ben je er.</a:t>
             </a:r>
             <a:endParaRPr lang="en-US" dirty="0"/>
           </a:p>
@@ -685,7 +1042,7 @@
           <a:p>
             <a:r>
               <a:rPr lang="en-US" dirty="0"/>
-              <a:t>Twee eigenschappen van collectieve goederen: niet-uitsluitbaar en niet-rivaliserend. Voorbeeld: straatverlichting, defensie, dijken.</a:t>
+              <a:t>Laat de leerlingen zelf beide eigenschappen terugvinden in het voorbeeld dijk. Pas daarna volgt de matrix — eerst de twee 'assen' apart begrijpen.</a:t>
             </a:r>
             <a:endParaRPr lang="en-US" dirty="0"/>
           </a:p>
@@ -773,7 +1130,7 @@
           <a:p>
             <a:r>
               <a:rPr lang="en-US" dirty="0"/>
-              <a:t>Toets elk goed op beide eigenschappen. Links: collectieve goederen. Rechts: goederen die dat niet zijn.</a:t>
+              <a:t>Dit is DE kapstok voor deze paragraaf. Leg elke cel even uit. Benadruk: alleen rechtsonder — niet-uitsluitbaar ÉN niet-rivaliserend — is een collectief goed. De andere drie kan de markt wel leveren.</a:t>
             </a:r>
             <a:endParaRPr lang="en-US" dirty="0"/>
           </a:p>
@@ -861,7 +1218,7 @@
           <a:p>
             <a:r>
               <a:rPr lang="en-US" dirty="0"/>
-              <a:t>De markt faalt bij collectieve goederen omdat je niet kunt uitsluiten. Geen prijs = geen omzet = geen winst.</a:t>
+              <a:t>Laat de leerlingen eerst een minuut nadenken per voorbeeld: welke eigenschap ontbreekt? Dan pas de uitleg.</a:t>
             </a:r>
             <a:endParaRPr lang="en-US" dirty="0"/>
           </a:p>
@@ -949,7 +1306,7 @@
           <a:p>
             <a:r>
               <a:rPr lang="en-US" dirty="0"/>
-              <a:t>Het meeliftgedrag (free-rider problem): iedereen profiteert, niemand wil betalen. Daarom moet de overheid ingrijpen.</a:t>
+              <a:t>Twee vragen beslissen alles. Test met nieuwe voorbeelden: Wikipedia? Openbare bieb? Snelweg zonder tol? Vuurwerkshow?</a:t>
             </a:r>
             <a:endParaRPr lang="en-US" dirty="0"/>
           </a:p>
@@ -1037,7 +1394,7 @@
           <a:p>
             <a:r>
               <a:rPr lang="en-US" dirty="0"/>
-              <a:t>De overheid dwingt iedereen mee te betalen via belastingen. Het verschil met de markt: de overheid kan belasting heffen, een bedrijf niet.</a:t>
+              <a:t>Free-rider = meelifter. De denkfout die niemand maakt maar iedereen verzwijgt: als ik niet betaal, gebeurt het tóch — dus waarom zou ik?</a:t>
             </a:r>
             <a:endParaRPr lang="en-US" dirty="0"/>
           </a:p>
@@ -1125,7 +1482,7 @@
           <a:p>
             <a:r>
               <a:rPr lang="en-US" dirty="0"/>
-              <a:t>Samenvatting: collectieve goederen zijn niet-uitsluitbaar en niet-rivaliserend. De markt faalt door meeliftgedrag. De overheid springt in via belastingheffing.</a:t>
+              <a:t>Dit is precies waarom een markt zou falen. Anna bouwt een dijk met haar eigen geld; Bo, Cem en Dina profiteren gratis. Anna realiseert dat en stopt. Eindresultaat: geen dijk.</a:t>
             </a:r>
             <a:endParaRPr lang="en-US" dirty="0"/>
           </a:p>
@@ -1149,6 +1506,94 @@
             <a:fld id="{F7021451-1387-4CA6-816F-3879F97B5CBC}" type="slidenum">
               <a:rPr lang="en-US"/>
               <a:t>8</a:t>
+            </a:fld>
+            <a:endParaRPr lang="en-US"/>
+          </a:p>
+        </p:txBody>
+      </p:sp>
+    </p:spTree>
+    <p:extLst>
+      <p:ext uri="{BB962C8B-B14F-4D97-AF65-F5344CB8AC3E}">
+        <p14:creationId xmlns:p14="http://schemas.microsoft.com/office/powerpoint/2010/main" val="1024086991"/>
+      </p:ext>
+    </p:extLst>
+  </p:cSld>
+  <p:clrMapOvr>
+    <a:masterClrMapping/>
+  </p:clrMapOvr>
+</p:notes>
+</file>
+
+<file path=ppt/notesSlides/notesSlide9.xml><?xml version="1.0" encoding="utf-8"?>
+<p:notes xmlns:a="http://schemas.openxmlformats.org/drawingml/2006/main" xmlns:r="http://schemas.openxmlformats.org/officeDocument/2006/relationships" xmlns:p="http://schemas.openxmlformats.org/presentationml/2006/main">
+  <p:cSld>
+    <p:spTree>
+      <p:nvGrpSpPr>
+        <p:cNvPr id="1" name=""/>
+        <p:cNvGrpSpPr/>
+        <p:nvPr/>
+      </p:nvGrpSpPr>
+      <p:grpSpPr>
+        <a:xfrm>
+          <a:off x="0" y="0"/>
+          <a:ext cx="0" cy="0"/>
+          <a:chOff x="0" y="0"/>
+          <a:chExt cx="0" cy="0"/>
+        </a:xfrm>
+      </p:grpSpPr>
+      <p:sp>
+        <p:nvSpPr>
+          <p:cNvPr id="2" name="Slide Image Placeholder 1"/>
+          <p:cNvSpPr>
+            <a:spLocks noGrp="1" noRot="1" noChangeAspect="1"/>
+          </p:cNvSpPr>
+          <p:nvPr>
+            <p:ph type="sldImg"/>
+          </p:nvPr>
+        </p:nvSpPr>
+        <p:spPr/>
+      </p:sp>
+      <p:sp>
+        <p:nvSpPr>
+          <p:cNvPr id="3" name="Notes Placeholder 2"/>
+          <p:cNvSpPr>
+            <a:spLocks noGrp="1"/>
+          </p:cNvSpPr>
+          <p:nvPr>
+            <p:ph type="body" idx="1"/>
+          </p:nvPr>
+        </p:nvSpPr>
+        <p:spPr/>
+        <p:txBody>
+          <a:bodyPr/>
+          <a:lstStyle/>
+          <a:p>
+            <a:r>
+              <a:rPr lang="en-US" dirty="0"/>
+              <a:t>De keten van marktfalen in 4 stappen. Dit is de klassieke redenering die op toetsen terugkomt.</a:t>
+            </a:r>
+            <a:endParaRPr lang="en-US" dirty="0"/>
+          </a:p>
+        </p:txBody>
+      </p:sp>
+      <p:sp>
+        <p:nvSpPr>
+          <p:cNvPr id="4" name="Slide Number Placeholder 3"/>
+          <p:cNvSpPr>
+            <a:spLocks noGrp="1"/>
+          </p:cNvSpPr>
+          <p:nvPr>
+            <p:ph type="sldNum" sz="quarter" idx="10"/>
+          </p:nvPr>
+        </p:nvSpPr>
+        <p:spPr/>
+        <p:txBody>
+          <a:bodyPr/>
+          <a:lstStyle/>
+          <a:p>
+            <a:fld id="{F7021451-1387-4CA6-816F-3879F97B5CBC}" type="slidenum">
+              <a:rPr lang="en-US"/>
+              <a:t>9</a:t>
             </a:fld>
             <a:endParaRPr lang="en-US"/>
           </a:p>
@@ -1742,6 +2187,1262 @@
 </p:sld>
 </file>
 
+<file path=ppt/slides/slide10.xml><?xml version="1.0" encoding="utf-8"?>
+<p:sld xmlns:a="http://schemas.openxmlformats.org/drawingml/2006/main" xmlns:r="http://schemas.openxmlformats.org/officeDocument/2006/relationships" xmlns:p="http://schemas.openxmlformats.org/presentationml/2006/main">
+  <p:cSld name="Slide 10">
+    <p:spTree>
+      <p:nvGrpSpPr>
+        <p:cNvPr id="1" name=""/>
+        <p:cNvGrpSpPr/>
+        <p:nvPr/>
+      </p:nvGrpSpPr>
+      <p:grpSpPr>
+        <a:xfrm>
+          <a:off x="0" y="0"/>
+          <a:ext cx="0" cy="0"/>
+          <a:chOff x="0" y="0"/>
+          <a:chExt cx="0" cy="0"/>
+        </a:xfrm>
+      </p:grpSpPr>
+      <p:sp>
+        <p:nvSpPr>
+          <p:cNvPr id="2" name="Text 0"/>
+          <p:cNvSpPr/>
+          <p:nvPr/>
+        </p:nvSpPr>
+        <p:spPr>
+          <a:xfrm>
+            <a:off x="457200" y="0"/>
+            <a:ext cx="8229600" cy="685800"/>
+          </a:xfrm>
+          <a:prstGeom prst="rect">
+            <a:avLst/>
+          </a:prstGeom>
+          <a:noFill/>
+          <a:ln/>
+        </p:spPr>
+        <p:txBody>
+          <a:bodyPr wrap="square" rtlCol="0" anchor="ctr"/>
+          <a:lstStyle/>
+          <a:p>
+            <a:pPr indent="0" marL="0">
+              <a:buNone/>
+            </a:pPr>
+            <a:r>
+              <a:rPr lang="en-US" sz="2400" b="1" dirty="0">
+                <a:solidFill>
+                  <a:srgbClr val="FFFFFF"/>
+                </a:solidFill>
+                <a:latin typeface="Arial" pitchFamily="34" charset="0"/>
+                <a:ea typeface="Arial" pitchFamily="34" charset="-122"/>
+                <a:cs typeface="Arial" pitchFamily="34" charset="-120"/>
+              </a:rPr>
+              <a:t>Markt faalt — overheid lost op</a:t>
+            </a:r>
+            <a:endParaRPr lang="en-US" sz="2400" dirty="0"/>
+          </a:p>
+        </p:txBody>
+      </p:sp>
+      <p:pic>
+        <p:nvPicPr>
+          <p:cNvPr id="3" name="Image 0" descr="preencoded.png">    </p:cNvPr>
+          <p:cNvPicPr>
+            <a:picLocks noChangeAspect="1"/>
+          </p:cNvPicPr>
+          <p:nvPr/>
+        </p:nvPicPr>
+        <p:blipFill>
+          <a:blip r:embed="rId1"/>
+          <a:stretch>
+            <a:fillRect/>
+          </a:stretch>
+        </p:blipFill>
+        <p:spPr>
+          <a:xfrm>
+            <a:off x="685800" y="868680"/>
+            <a:ext cx="7772400" cy="3886200"/>
+          </a:xfrm>
+          <a:prstGeom prst="rect">
+            <a:avLst/>
+          </a:prstGeom>
+        </p:spPr>
+      </p:pic>
+    </p:spTree>
+  </p:cSld>
+  <p:clrMapOvr>
+    <a:masterClrMapping/>
+  </p:clrMapOvr>
+</p:sld>
+</file>
+
+<file path=ppt/slides/slide11.xml><?xml version="1.0" encoding="utf-8"?>
+<p:sld xmlns:a="http://schemas.openxmlformats.org/drawingml/2006/main" xmlns:r="http://schemas.openxmlformats.org/officeDocument/2006/relationships" xmlns:p="http://schemas.openxmlformats.org/presentationml/2006/main">
+  <p:cSld name="Slide 11">
+    <p:spTree>
+      <p:nvGrpSpPr>
+        <p:cNvPr id="1" name=""/>
+        <p:cNvGrpSpPr/>
+        <p:nvPr/>
+      </p:nvGrpSpPr>
+      <p:grpSpPr>
+        <a:xfrm>
+          <a:off x="0" y="0"/>
+          <a:ext cx="0" cy="0"/>
+          <a:chOff x="0" y="0"/>
+          <a:chExt cx="0" cy="0"/>
+        </a:xfrm>
+      </p:grpSpPr>
+      <p:sp>
+        <p:nvSpPr>
+          <p:cNvPr id="2" name="Text 0"/>
+          <p:cNvSpPr/>
+          <p:nvPr/>
+        </p:nvSpPr>
+        <p:spPr>
+          <a:xfrm>
+            <a:off x="457200" y="0"/>
+            <a:ext cx="8229600" cy="685800"/>
+          </a:xfrm>
+          <a:prstGeom prst="rect">
+            <a:avLst/>
+          </a:prstGeom>
+          <a:noFill/>
+          <a:ln/>
+        </p:spPr>
+        <p:txBody>
+          <a:bodyPr wrap="square" rtlCol="0" anchor="ctr"/>
+          <a:lstStyle/>
+          <a:p>
+            <a:pPr indent="0" marL="0">
+              <a:buNone/>
+            </a:pPr>
+            <a:r>
+              <a:rPr lang="en-US" sz="2400" b="1" dirty="0">
+                <a:solidFill>
+                  <a:srgbClr val="FFFFFF"/>
+                </a:solidFill>
+                <a:latin typeface="Arial" pitchFamily="34" charset="0"/>
+                <a:ea typeface="Arial" pitchFamily="34" charset="-122"/>
+                <a:cs typeface="Arial" pitchFamily="34" charset="-120"/>
+              </a:rPr>
+              <a:t>De overheid als oplossing</a:t>
+            </a:r>
+            <a:endParaRPr lang="en-US" sz="2400" dirty="0"/>
+          </a:p>
+        </p:txBody>
+      </p:sp>
+      <p:sp>
+        <p:nvSpPr>
+          <p:cNvPr id="3" name="Shape 1"/>
+          <p:cNvSpPr/>
+          <p:nvPr/>
+        </p:nvSpPr>
+        <p:spPr>
+          <a:xfrm>
+            <a:off x="1188720" y="1005840"/>
+            <a:ext cx="6766560" cy="548640"/>
+          </a:xfrm>
+          <a:prstGeom prst="rect">
+            <a:avLst>
+              <a:gd name="adj" fmla="val 6667"/>
+            </a:avLst>
+          </a:prstGeom>
+          <a:solidFill>
+            <a:srgbClr val="F9F6F1"/>
+          </a:solidFill>
+          <a:ln/>
+          <a:effectLst>
+            <a:outerShdw sx="100000" sy="100000" kx="0" ky="0" algn="bl" rotWithShape="0" blurRad="76200" dist="25400" dir="8100000">
+              <a:srgbClr val="000000">
+                <a:alpha val="10000"/>
+              </a:srgbClr>
+            </a:outerShdw>
+          </a:effectLst>
+        </p:spPr>
+      </p:sp>
+      <p:sp>
+        <p:nvSpPr>
+          <p:cNvPr id="4" name="Text 2"/>
+          <p:cNvSpPr/>
+          <p:nvPr/>
+        </p:nvSpPr>
+        <p:spPr>
+          <a:xfrm>
+            <a:off x="1371600" y="1005840"/>
+            <a:ext cx="6492240" cy="548640"/>
+          </a:xfrm>
+          <a:prstGeom prst="rect">
+            <a:avLst/>
+          </a:prstGeom>
+          <a:noFill/>
+          <a:ln/>
+        </p:spPr>
+        <p:txBody>
+          <a:bodyPr wrap="square" lIns="0" tIns="0" rIns="0" bIns="0" rtlCol="0" anchor="ctr"/>
+          <a:lstStyle/>
+          <a:p>
+            <a:pPr indent="0" marL="0">
+              <a:buNone/>
+            </a:pPr>
+            <a:r>
+              <a:rPr lang="en-US" sz="1400" dirty="0">
+                <a:solidFill>
+                  <a:srgbClr val="2D3748"/>
+                </a:solidFill>
+                <a:latin typeface="Arial" pitchFamily="34" charset="0"/>
+                <a:ea typeface="Arial" pitchFamily="34" charset="-122"/>
+                <a:cs typeface="Arial" pitchFamily="34" charset="-120"/>
+              </a:rPr>
+              <a:t>Markt faalt: geen private aanbieder</a:t>
+            </a:r>
+            <a:endParaRPr lang="en-US" sz="1400" dirty="0"/>
+          </a:p>
+        </p:txBody>
+      </p:sp>
+      <p:sp>
+        <p:nvSpPr>
+          <p:cNvPr id="5" name="Shape 3"/>
+          <p:cNvSpPr/>
+          <p:nvPr/>
+        </p:nvSpPr>
+        <p:spPr>
+          <a:xfrm>
+            <a:off x="1188720" y="1664208"/>
+            <a:ext cx="6766560" cy="548640"/>
+          </a:xfrm>
+          <a:prstGeom prst="rect">
+            <a:avLst>
+              <a:gd name="adj" fmla="val 6667"/>
+            </a:avLst>
+          </a:prstGeom>
+          <a:solidFill>
+            <a:srgbClr val="F9F6F1"/>
+          </a:solidFill>
+          <a:ln/>
+          <a:effectLst>
+            <a:outerShdw sx="100000" sy="100000" kx="0" ky="0" algn="bl" rotWithShape="0" blurRad="76200" dist="25400" dir="8100000">
+              <a:srgbClr val="000000">
+                <a:alpha val="10000"/>
+              </a:srgbClr>
+            </a:outerShdw>
+          </a:effectLst>
+        </p:spPr>
+      </p:sp>
+      <p:sp>
+        <p:nvSpPr>
+          <p:cNvPr id="6" name="Text 4"/>
+          <p:cNvSpPr/>
+          <p:nvPr/>
+        </p:nvSpPr>
+        <p:spPr>
+          <a:xfrm>
+            <a:off x="1371600" y="1664208"/>
+            <a:ext cx="6492240" cy="548640"/>
+          </a:xfrm>
+          <a:prstGeom prst="rect">
+            <a:avLst/>
+          </a:prstGeom>
+          <a:noFill/>
+          <a:ln/>
+        </p:spPr>
+        <p:txBody>
+          <a:bodyPr wrap="square" lIns="0" tIns="0" rIns="0" bIns="0" rtlCol="0" anchor="ctr"/>
+          <a:lstStyle/>
+          <a:p>
+            <a:pPr indent="0" marL="0">
+              <a:buNone/>
+            </a:pPr>
+            <a:r>
+              <a:rPr lang="en-US" sz="1400" dirty="0">
+                <a:solidFill>
+                  <a:srgbClr val="2D3748"/>
+                </a:solidFill>
+                <a:latin typeface="Arial" pitchFamily="34" charset="0"/>
+                <a:ea typeface="Arial" pitchFamily="34" charset="-122"/>
+                <a:cs typeface="Arial" pitchFamily="34" charset="-120"/>
+              </a:rPr>
+              <a:t>↓  Overheid biedt collectief goed aan</a:t>
+            </a:r>
+            <a:endParaRPr lang="en-US" sz="1400" dirty="0"/>
+          </a:p>
+        </p:txBody>
+      </p:sp>
+      <p:sp>
+        <p:nvSpPr>
+          <p:cNvPr id="7" name="Shape 5"/>
+          <p:cNvSpPr/>
+          <p:nvPr/>
+        </p:nvSpPr>
+        <p:spPr>
+          <a:xfrm>
+            <a:off x="1188720" y="2322576"/>
+            <a:ext cx="6766560" cy="548640"/>
+          </a:xfrm>
+          <a:prstGeom prst="rect">
+            <a:avLst>
+              <a:gd name="adj" fmla="val 6667"/>
+            </a:avLst>
+          </a:prstGeom>
+          <a:solidFill>
+            <a:srgbClr val="186A3B"/>
+          </a:solidFill>
+          <a:ln/>
+          <a:effectLst>
+            <a:outerShdw sx="100000" sy="100000" kx="0" ky="0" algn="bl" rotWithShape="0" blurRad="76200" dist="25400" dir="8100000">
+              <a:srgbClr val="000000">
+                <a:alpha val="10000"/>
+              </a:srgbClr>
+            </a:outerShdw>
+          </a:effectLst>
+        </p:spPr>
+      </p:sp>
+      <p:sp>
+        <p:nvSpPr>
+          <p:cNvPr id="8" name="Text 6"/>
+          <p:cNvSpPr/>
+          <p:nvPr/>
+        </p:nvSpPr>
+        <p:spPr>
+          <a:xfrm>
+            <a:off x="1371600" y="2322576"/>
+            <a:ext cx="6492240" cy="548640"/>
+          </a:xfrm>
+          <a:prstGeom prst="rect">
+            <a:avLst/>
+          </a:prstGeom>
+          <a:noFill/>
+          <a:ln/>
+        </p:spPr>
+        <p:txBody>
+          <a:bodyPr wrap="square" lIns="0" tIns="0" rIns="0" bIns="0" rtlCol="0" anchor="ctr"/>
+          <a:lstStyle/>
+          <a:p>
+            <a:pPr indent="0" marL="0">
+              <a:buNone/>
+            </a:pPr>
+            <a:r>
+              <a:rPr lang="en-US" sz="1400" b="1" dirty="0">
+                <a:solidFill>
+                  <a:srgbClr val="FFFFFF"/>
+                </a:solidFill>
+                <a:latin typeface="Arial" pitchFamily="34" charset="0"/>
+                <a:ea typeface="Arial" pitchFamily="34" charset="-122"/>
+                <a:cs typeface="Arial" pitchFamily="34" charset="-120"/>
+              </a:rPr>
+              <a:t>↓  Betaling via VERPLICHTE belasting</a:t>
+            </a:r>
+            <a:endParaRPr lang="en-US" sz="1400" dirty="0"/>
+          </a:p>
+        </p:txBody>
+      </p:sp>
+      <p:sp>
+        <p:nvSpPr>
+          <p:cNvPr id="9" name="Shape 7"/>
+          <p:cNvSpPr/>
+          <p:nvPr/>
+        </p:nvSpPr>
+        <p:spPr>
+          <a:xfrm>
+            <a:off x="1188720" y="2980944"/>
+            <a:ext cx="6766560" cy="548640"/>
+          </a:xfrm>
+          <a:prstGeom prst="rect">
+            <a:avLst>
+              <a:gd name="adj" fmla="val 6667"/>
+            </a:avLst>
+          </a:prstGeom>
+          <a:solidFill>
+            <a:srgbClr val="F9F6F1"/>
+          </a:solidFill>
+          <a:ln/>
+          <a:effectLst>
+            <a:outerShdw sx="100000" sy="100000" kx="0" ky="0" algn="bl" rotWithShape="0" blurRad="76200" dist="25400" dir="8100000">
+              <a:srgbClr val="000000">
+                <a:alpha val="10000"/>
+              </a:srgbClr>
+            </a:outerShdw>
+          </a:effectLst>
+        </p:spPr>
+      </p:sp>
+      <p:sp>
+        <p:nvSpPr>
+          <p:cNvPr id="10" name="Text 8"/>
+          <p:cNvSpPr/>
+          <p:nvPr/>
+        </p:nvSpPr>
+        <p:spPr>
+          <a:xfrm>
+            <a:off x="1371600" y="2980944"/>
+            <a:ext cx="6492240" cy="548640"/>
+          </a:xfrm>
+          <a:prstGeom prst="rect">
+            <a:avLst/>
+          </a:prstGeom>
+          <a:noFill/>
+          <a:ln/>
+        </p:spPr>
+        <p:txBody>
+          <a:bodyPr wrap="square" lIns="0" tIns="0" rIns="0" bIns="0" rtlCol="0" anchor="ctr"/>
+          <a:lstStyle/>
+          <a:p>
+            <a:pPr indent="0" marL="0">
+              <a:buNone/>
+            </a:pPr>
+            <a:r>
+              <a:rPr lang="en-US" sz="1400" dirty="0">
+                <a:solidFill>
+                  <a:srgbClr val="2D3748"/>
+                </a:solidFill>
+                <a:latin typeface="Arial" pitchFamily="34" charset="0"/>
+                <a:ea typeface="Arial" pitchFamily="34" charset="-122"/>
+                <a:cs typeface="Arial" pitchFamily="34" charset="-120"/>
+              </a:rPr>
+              <a:t>↓  Iedereen profiteert én betaalt mee</a:t>
+            </a:r>
+            <a:endParaRPr lang="en-US" sz="1400" dirty="0"/>
+          </a:p>
+        </p:txBody>
+      </p:sp>
+      <p:sp>
+        <p:nvSpPr>
+          <p:cNvPr id="11" name="Shape 9"/>
+          <p:cNvSpPr/>
+          <p:nvPr/>
+        </p:nvSpPr>
+        <p:spPr>
+          <a:xfrm>
+            <a:off x="548640" y="3794760"/>
+            <a:ext cx="8046720" cy="868680"/>
+          </a:xfrm>
+          <a:prstGeom prst="rect">
+            <a:avLst>
+              <a:gd name="adj" fmla="val 4211"/>
+            </a:avLst>
+          </a:prstGeom>
+          <a:solidFill>
+            <a:srgbClr val="FFF8E1"/>
+          </a:solidFill>
+          <a:ln/>
+          <a:effectLst>
+            <a:outerShdw sx="100000" sy="100000" kx="0" ky="0" algn="bl" rotWithShape="0" blurRad="76200" dist="25400" dir="8100000">
+              <a:srgbClr val="000000">
+                <a:alpha val="10000"/>
+              </a:srgbClr>
+            </a:outerShdw>
+          </a:effectLst>
+        </p:spPr>
+      </p:sp>
+      <p:sp>
+        <p:nvSpPr>
+          <p:cNvPr id="12" name="Shape 10"/>
+          <p:cNvSpPr/>
+          <p:nvPr/>
+        </p:nvSpPr>
+        <p:spPr>
+          <a:xfrm>
+            <a:off x="548640" y="3794760"/>
+            <a:ext cx="54864" cy="868680"/>
+          </a:xfrm>
+          <a:prstGeom prst="rect">
+            <a:avLst/>
+          </a:prstGeom>
+          <a:solidFill>
+            <a:srgbClr val="F9A825"/>
+          </a:solidFill>
+          <a:ln/>
+        </p:spPr>
+      </p:sp>
+      <p:sp>
+        <p:nvSpPr>
+          <p:cNvPr id="13" name="Text 11"/>
+          <p:cNvSpPr/>
+          <p:nvPr/>
+        </p:nvSpPr>
+        <p:spPr>
+          <a:xfrm>
+            <a:off x="749808" y="3867912"/>
+            <a:ext cx="7680960" cy="292608"/>
+          </a:xfrm>
+          <a:prstGeom prst="rect">
+            <a:avLst/>
+          </a:prstGeom>
+          <a:noFill/>
+          <a:ln/>
+        </p:spPr>
+        <p:txBody>
+          <a:bodyPr wrap="square" lIns="0" tIns="0" rIns="0" bIns="0" rtlCol="0" anchor="ctr"/>
+          <a:lstStyle/>
+          <a:p>
+            <a:pPr indent="0" marL="0">
+              <a:buNone/>
+            </a:pPr>
+            <a:r>
+              <a:rPr lang="en-US" sz="1400" b="1" dirty="0">
+                <a:solidFill>
+                  <a:srgbClr val="7B4A12"/>
+                </a:solidFill>
+                <a:latin typeface="Arial" pitchFamily="34" charset="0"/>
+                <a:ea typeface="Arial" pitchFamily="34" charset="-122"/>
+                <a:cs typeface="Arial" pitchFamily="34" charset="-120"/>
+              </a:rPr>
+              <a:t>Kernpunt</a:t>
+            </a:r>
+            <a:endParaRPr lang="en-US" sz="1400" dirty="0"/>
+          </a:p>
+        </p:txBody>
+      </p:sp>
+      <p:sp>
+        <p:nvSpPr>
+          <p:cNvPr id="14" name="Text 12"/>
+          <p:cNvSpPr/>
+          <p:nvPr/>
+        </p:nvSpPr>
+        <p:spPr>
+          <a:xfrm>
+            <a:off x="749808" y="4160520"/>
+            <a:ext cx="7680960" cy="457200"/>
+          </a:xfrm>
+          <a:prstGeom prst="rect">
+            <a:avLst/>
+          </a:prstGeom>
+          <a:noFill/>
+          <a:ln/>
+        </p:spPr>
+        <p:txBody>
+          <a:bodyPr wrap="square" lIns="0" tIns="0" rIns="0" bIns="0" rtlCol="0" anchor="ctr"/>
+          <a:lstStyle/>
+          <a:p>
+            <a:pPr indent="0" marL="0">
+              <a:lnSpc>
+                <a:spcPct val="120000"/>
+              </a:lnSpc>
+              <a:buNone/>
+            </a:pPr>
+            <a:r>
+              <a:rPr lang="en-US" sz="1300" dirty="0">
+                <a:solidFill>
+                  <a:srgbClr val="2D3748"/>
+                </a:solidFill>
+                <a:latin typeface="Arial" pitchFamily="34" charset="0"/>
+                <a:ea typeface="Arial" pitchFamily="34" charset="-122"/>
+                <a:cs typeface="Arial" pitchFamily="34" charset="-120"/>
+              </a:rPr>
+              <a:t>De overheid kan iedereen laten meebetalen via belastingheffing — dat kan een particuliere aanbieder niet.</a:t>
+            </a:r>
+            <a:endParaRPr lang="en-US" sz="1300" dirty="0"/>
+          </a:p>
+        </p:txBody>
+      </p:sp>
+    </p:spTree>
+  </p:cSld>
+  <p:clrMapOvr>
+    <a:masterClrMapping/>
+  </p:clrMapOvr>
+</p:sld>
+</file>
+
+<file path=ppt/slides/slide12.xml><?xml version="1.0" encoding="utf-8"?>
+<p:sld xmlns:a="http://schemas.openxmlformats.org/drawingml/2006/main" xmlns:r="http://schemas.openxmlformats.org/officeDocument/2006/relationships" xmlns:p="http://schemas.openxmlformats.org/presentationml/2006/main">
+  <p:cSld name="Slide 12">
+    <p:spTree>
+      <p:nvGrpSpPr>
+        <p:cNvPr id="1" name=""/>
+        <p:cNvGrpSpPr/>
+        <p:nvPr/>
+      </p:nvGrpSpPr>
+      <p:grpSpPr>
+        <a:xfrm>
+          <a:off x="0" y="0"/>
+          <a:ext cx="0" cy="0"/>
+          <a:chOff x="0" y="0"/>
+          <a:chExt cx="0" cy="0"/>
+        </a:xfrm>
+      </p:grpSpPr>
+      <p:sp>
+        <p:nvSpPr>
+          <p:cNvPr id="2" name="Text 0"/>
+          <p:cNvSpPr/>
+          <p:nvPr/>
+        </p:nvSpPr>
+        <p:spPr>
+          <a:xfrm>
+            <a:off x="457200" y="0"/>
+            <a:ext cx="8229600" cy="685800"/>
+          </a:xfrm>
+          <a:prstGeom prst="rect">
+            <a:avLst/>
+          </a:prstGeom>
+          <a:noFill/>
+          <a:ln/>
+        </p:spPr>
+        <p:txBody>
+          <a:bodyPr wrap="square" rtlCol="0" anchor="ctr"/>
+          <a:lstStyle/>
+          <a:p>
+            <a:pPr indent="0" marL="0">
+              <a:buNone/>
+            </a:pPr>
+            <a:r>
+              <a:rPr lang="en-US" sz="2400" b="1" dirty="0">
+                <a:solidFill>
+                  <a:srgbClr val="FFFFFF"/>
+                </a:solidFill>
+                <a:latin typeface="Arial" pitchFamily="34" charset="0"/>
+                <a:ea typeface="Arial" pitchFamily="34" charset="-122"/>
+                <a:cs typeface="Arial" pitchFamily="34" charset="-120"/>
+              </a:rPr>
+              <a:t>Valkuilen</a:t>
+            </a:r>
+            <a:endParaRPr lang="en-US" sz="2400" dirty="0"/>
+          </a:p>
+        </p:txBody>
+      </p:sp>
+      <p:sp>
+        <p:nvSpPr>
+          <p:cNvPr id="3" name="Shape 1"/>
+          <p:cNvSpPr/>
+          <p:nvPr/>
+        </p:nvSpPr>
+        <p:spPr>
+          <a:xfrm>
+            <a:off x="548640" y="960120"/>
+            <a:ext cx="8046720" cy="1069848"/>
+          </a:xfrm>
+          <a:prstGeom prst="rect">
+            <a:avLst>
+              <a:gd name="adj" fmla="val 3419"/>
+            </a:avLst>
+          </a:prstGeom>
+          <a:solidFill>
+            <a:srgbClr val="FDE8E8"/>
+          </a:solidFill>
+          <a:ln/>
+        </p:spPr>
+      </p:sp>
+      <p:sp>
+        <p:nvSpPr>
+          <p:cNvPr id="4" name="Shape 2"/>
+          <p:cNvSpPr/>
+          <p:nvPr/>
+        </p:nvSpPr>
+        <p:spPr>
+          <a:xfrm>
+            <a:off x="548640" y="960120"/>
+            <a:ext cx="54864" cy="1069848"/>
+          </a:xfrm>
+          <a:prstGeom prst="rect">
+            <a:avLst/>
+          </a:prstGeom>
+          <a:solidFill>
+            <a:srgbClr val="D9534F"/>
+          </a:solidFill>
+          <a:ln/>
+        </p:spPr>
+      </p:sp>
+      <p:sp>
+        <p:nvSpPr>
+          <p:cNvPr id="5" name="Text 3"/>
+          <p:cNvSpPr/>
+          <p:nvPr/>
+        </p:nvSpPr>
+        <p:spPr>
+          <a:xfrm>
+            <a:off x="777240" y="1051560"/>
+            <a:ext cx="7680960" cy="365760"/>
+          </a:xfrm>
+          <a:prstGeom prst="rect">
+            <a:avLst/>
+          </a:prstGeom>
+          <a:noFill/>
+          <a:ln/>
+        </p:spPr>
+        <p:txBody>
+          <a:bodyPr wrap="square" lIns="0" tIns="0" rIns="0" bIns="0" rtlCol="0" anchor="t"/>
+          <a:lstStyle/>
+          <a:p>
+            <a:pPr indent="0" marL="0">
+              <a:buNone/>
+            </a:pPr>
+            <a:r>
+              <a:rPr lang="en-US" sz="1500" b="1" dirty="0">
+                <a:solidFill>
+                  <a:srgbClr val="922B21"/>
+                </a:solidFill>
+                <a:latin typeface="Arial" pitchFamily="34" charset="0"/>
+                <a:ea typeface="Arial" pitchFamily="34" charset="-122"/>
+                <a:cs typeface="Arial" pitchFamily="34" charset="-120"/>
+              </a:rPr>
+              <a:t>“Als de overheid het levert, is het een collectief goed”</a:t>
+            </a:r>
+            <a:endParaRPr lang="en-US" sz="1500" dirty="0"/>
+          </a:p>
+        </p:txBody>
+      </p:sp>
+      <p:sp>
+        <p:nvSpPr>
+          <p:cNvPr id="6" name="Text 4"/>
+          <p:cNvSpPr/>
+          <p:nvPr/>
+        </p:nvSpPr>
+        <p:spPr>
+          <a:xfrm>
+            <a:off x="777240" y="1399032"/>
+            <a:ext cx="7680960" cy="566928"/>
+          </a:xfrm>
+          <a:prstGeom prst="rect">
+            <a:avLst/>
+          </a:prstGeom>
+          <a:noFill/>
+          <a:ln/>
+        </p:spPr>
+        <p:txBody>
+          <a:bodyPr wrap="square" lIns="0" tIns="0" rIns="0" bIns="0" rtlCol="0" anchor="t"/>
+          <a:lstStyle/>
+          <a:p>
+            <a:pPr indent="0" marL="0">
+              <a:lnSpc>
+                <a:spcPct val="120000"/>
+              </a:lnSpc>
+              <a:buNone/>
+            </a:pPr>
+            <a:r>
+              <a:rPr lang="en-US" sz="1200" dirty="0">
+                <a:solidFill>
+                  <a:srgbClr val="2D3748"/>
+                </a:solidFill>
+                <a:latin typeface="Arial" pitchFamily="34" charset="0"/>
+                <a:ea typeface="Arial" pitchFamily="34" charset="-122"/>
+                <a:cs typeface="Arial" pitchFamily="34" charset="-120"/>
+              </a:rPr>
+              <a:t>Onjuist. Of iets collectief is hangt af van de EIGENSCHAPPEN (niet-uitsluitbaar + niet-rivaliserend), niet van wie het levert. Zwembaden worden door de overheid betaald maar zijn wél uitsluitbaar — géén collectief goed.</a:t>
+            </a:r>
+            <a:endParaRPr lang="en-US" sz="1200" dirty="0"/>
+          </a:p>
+        </p:txBody>
+      </p:sp>
+      <p:sp>
+        <p:nvSpPr>
+          <p:cNvPr id="7" name="Shape 5"/>
+          <p:cNvSpPr/>
+          <p:nvPr/>
+        </p:nvSpPr>
+        <p:spPr>
+          <a:xfrm>
+            <a:off x="548640" y="2157984"/>
+            <a:ext cx="8046720" cy="1069848"/>
+          </a:xfrm>
+          <a:prstGeom prst="rect">
+            <a:avLst>
+              <a:gd name="adj" fmla="val 3419"/>
+            </a:avLst>
+          </a:prstGeom>
+          <a:solidFill>
+            <a:srgbClr val="FDE8E8"/>
+          </a:solidFill>
+          <a:ln/>
+        </p:spPr>
+      </p:sp>
+      <p:sp>
+        <p:nvSpPr>
+          <p:cNvPr id="8" name="Shape 6"/>
+          <p:cNvSpPr/>
+          <p:nvPr/>
+        </p:nvSpPr>
+        <p:spPr>
+          <a:xfrm>
+            <a:off x="548640" y="2157984"/>
+            <a:ext cx="54864" cy="1069848"/>
+          </a:xfrm>
+          <a:prstGeom prst="rect">
+            <a:avLst/>
+          </a:prstGeom>
+          <a:solidFill>
+            <a:srgbClr val="D9534F"/>
+          </a:solidFill>
+          <a:ln/>
+        </p:spPr>
+      </p:sp>
+      <p:sp>
+        <p:nvSpPr>
+          <p:cNvPr id="9" name="Text 7"/>
+          <p:cNvSpPr/>
+          <p:nvPr/>
+        </p:nvSpPr>
+        <p:spPr>
+          <a:xfrm>
+            <a:off x="777240" y="2249424"/>
+            <a:ext cx="7680960" cy="365760"/>
+          </a:xfrm>
+          <a:prstGeom prst="rect">
+            <a:avLst/>
+          </a:prstGeom>
+          <a:noFill/>
+          <a:ln/>
+        </p:spPr>
+        <p:txBody>
+          <a:bodyPr wrap="square" lIns="0" tIns="0" rIns="0" bIns="0" rtlCol="0" anchor="t"/>
+          <a:lstStyle/>
+          <a:p>
+            <a:pPr indent="0" marL="0">
+              <a:buNone/>
+            </a:pPr>
+            <a:r>
+              <a:rPr lang="en-US" sz="1500" b="1" dirty="0">
+                <a:solidFill>
+                  <a:srgbClr val="922B21"/>
+                </a:solidFill>
+                <a:latin typeface="Arial" pitchFamily="34" charset="0"/>
+                <a:ea typeface="Arial" pitchFamily="34" charset="-122"/>
+                <a:cs typeface="Arial" pitchFamily="34" charset="-120"/>
+              </a:rPr>
+              <a:t>“Een collectief goed is gratis”</a:t>
+            </a:r>
+            <a:endParaRPr lang="en-US" sz="1500" dirty="0"/>
+          </a:p>
+        </p:txBody>
+      </p:sp>
+      <p:sp>
+        <p:nvSpPr>
+          <p:cNvPr id="10" name="Text 8"/>
+          <p:cNvSpPr/>
+          <p:nvPr/>
+        </p:nvSpPr>
+        <p:spPr>
+          <a:xfrm>
+            <a:off x="777240" y="2596896"/>
+            <a:ext cx="7680960" cy="566928"/>
+          </a:xfrm>
+          <a:prstGeom prst="rect">
+            <a:avLst/>
+          </a:prstGeom>
+          <a:noFill/>
+          <a:ln/>
+        </p:spPr>
+        <p:txBody>
+          <a:bodyPr wrap="square" lIns="0" tIns="0" rIns="0" bIns="0" rtlCol="0" anchor="t"/>
+          <a:lstStyle/>
+          <a:p>
+            <a:pPr indent="0" marL="0">
+              <a:lnSpc>
+                <a:spcPct val="120000"/>
+              </a:lnSpc>
+              <a:buNone/>
+            </a:pPr>
+            <a:r>
+              <a:rPr lang="en-US" sz="1200" dirty="0">
+                <a:solidFill>
+                  <a:srgbClr val="2D3748"/>
+                </a:solidFill>
+                <a:latin typeface="Arial" pitchFamily="34" charset="0"/>
+                <a:ea typeface="Arial" pitchFamily="34" charset="-122"/>
+                <a:cs typeface="Arial" pitchFamily="34" charset="-120"/>
+              </a:rPr>
+              <a:t>Onjuist. Het lijkt gratis bij gebruik, maar het wordt betaald via belasting. Iedereen betaalt dus mee, ongeacht gebruik.</a:t>
+            </a:r>
+            <a:endParaRPr lang="en-US" sz="1200" dirty="0"/>
+          </a:p>
+        </p:txBody>
+      </p:sp>
+      <p:sp>
+        <p:nvSpPr>
+          <p:cNvPr id="11" name="Shape 9"/>
+          <p:cNvSpPr/>
+          <p:nvPr/>
+        </p:nvSpPr>
+        <p:spPr>
+          <a:xfrm>
+            <a:off x="548640" y="3355848"/>
+            <a:ext cx="8046720" cy="1069848"/>
+          </a:xfrm>
+          <a:prstGeom prst="rect">
+            <a:avLst>
+              <a:gd name="adj" fmla="val 3419"/>
+            </a:avLst>
+          </a:prstGeom>
+          <a:solidFill>
+            <a:srgbClr val="FDE8E8"/>
+          </a:solidFill>
+          <a:ln/>
+        </p:spPr>
+      </p:sp>
+      <p:sp>
+        <p:nvSpPr>
+          <p:cNvPr id="12" name="Shape 10"/>
+          <p:cNvSpPr/>
+          <p:nvPr/>
+        </p:nvSpPr>
+        <p:spPr>
+          <a:xfrm>
+            <a:off x="548640" y="3355848"/>
+            <a:ext cx="54864" cy="1069848"/>
+          </a:xfrm>
+          <a:prstGeom prst="rect">
+            <a:avLst/>
+          </a:prstGeom>
+          <a:solidFill>
+            <a:srgbClr val="D9534F"/>
+          </a:solidFill>
+          <a:ln/>
+        </p:spPr>
+      </p:sp>
+      <p:sp>
+        <p:nvSpPr>
+          <p:cNvPr id="13" name="Text 11"/>
+          <p:cNvSpPr/>
+          <p:nvPr/>
+        </p:nvSpPr>
+        <p:spPr>
+          <a:xfrm>
+            <a:off x="777240" y="3447288"/>
+            <a:ext cx="7680960" cy="365760"/>
+          </a:xfrm>
+          <a:prstGeom prst="rect">
+            <a:avLst/>
+          </a:prstGeom>
+          <a:noFill/>
+          <a:ln/>
+        </p:spPr>
+        <p:txBody>
+          <a:bodyPr wrap="square" lIns="0" tIns="0" rIns="0" bIns="0" rtlCol="0" anchor="t"/>
+          <a:lstStyle/>
+          <a:p>
+            <a:pPr indent="0" marL="0">
+              <a:buNone/>
+            </a:pPr>
+            <a:r>
+              <a:rPr lang="en-US" sz="1500" b="1" dirty="0">
+                <a:solidFill>
+                  <a:srgbClr val="922B21"/>
+                </a:solidFill>
+                <a:latin typeface="Arial" pitchFamily="34" charset="0"/>
+                <a:ea typeface="Arial" pitchFamily="34" charset="-122"/>
+                <a:cs typeface="Arial" pitchFamily="34" charset="-120"/>
+              </a:rPr>
+              <a:t>“Een gemeenschappelijk goed is hetzelfde als een collectief goed”</a:t>
+            </a:r>
+            <a:endParaRPr lang="en-US" sz="1500" dirty="0"/>
+          </a:p>
+        </p:txBody>
+      </p:sp>
+      <p:sp>
+        <p:nvSpPr>
+          <p:cNvPr id="14" name="Text 12"/>
+          <p:cNvSpPr/>
+          <p:nvPr/>
+        </p:nvSpPr>
+        <p:spPr>
+          <a:xfrm>
+            <a:off x="777240" y="3794760"/>
+            <a:ext cx="7680960" cy="566928"/>
+          </a:xfrm>
+          <a:prstGeom prst="rect">
+            <a:avLst/>
+          </a:prstGeom>
+          <a:noFill/>
+          <a:ln/>
+        </p:spPr>
+        <p:txBody>
+          <a:bodyPr wrap="square" lIns="0" tIns="0" rIns="0" bIns="0" rtlCol="0" anchor="t"/>
+          <a:lstStyle/>
+          <a:p>
+            <a:pPr indent="0" marL="0">
+              <a:lnSpc>
+                <a:spcPct val="120000"/>
+              </a:lnSpc>
+              <a:buNone/>
+            </a:pPr>
+            <a:r>
+              <a:rPr lang="en-US" sz="1200" dirty="0">
+                <a:solidFill>
+                  <a:srgbClr val="2D3748"/>
+                </a:solidFill>
+                <a:latin typeface="Arial" pitchFamily="34" charset="0"/>
+                <a:ea typeface="Arial" pitchFamily="34" charset="-122"/>
+                <a:cs typeface="Arial" pitchFamily="34" charset="-120"/>
+              </a:rPr>
+              <a:t>Onjuist. Gemeenschappelijke goederen zijn RIVALISEREND (visgronden raken op), collectieve goederen niet. Alleen het tweede kwadrant rechtsonder in de matrix is écht collectief.</a:t>
+            </a:r>
+            <a:endParaRPr lang="en-US" sz="1200" dirty="0"/>
+          </a:p>
+        </p:txBody>
+      </p:sp>
+    </p:spTree>
+  </p:cSld>
+  <p:clrMapOvr>
+    <a:masterClrMapping/>
+  </p:clrMapOvr>
+</p:sld>
+</file>
+
+<file path=ppt/slides/slide13.xml><?xml version="1.0" encoding="utf-8"?>
+<p:sld xmlns:a="http://schemas.openxmlformats.org/drawingml/2006/main" xmlns:r="http://schemas.openxmlformats.org/officeDocument/2006/relationships" xmlns:p="http://schemas.openxmlformats.org/presentationml/2006/main">
+  <p:cSld name="Slide 13">
+    <p:spTree>
+      <p:nvGrpSpPr>
+        <p:cNvPr id="1" name=""/>
+        <p:cNvGrpSpPr/>
+        <p:nvPr/>
+      </p:nvGrpSpPr>
+      <p:grpSpPr>
+        <a:xfrm>
+          <a:off x="0" y="0"/>
+          <a:ext cx="0" cy="0"/>
+          <a:chOff x="0" y="0"/>
+          <a:chExt cx="0" cy="0"/>
+        </a:xfrm>
+      </p:grpSpPr>
+      <p:sp>
+        <p:nvSpPr>
+          <p:cNvPr id="2" name="Text 0"/>
+          <p:cNvSpPr/>
+          <p:nvPr/>
+        </p:nvSpPr>
+        <p:spPr>
+          <a:xfrm>
+            <a:off x="640080" y="320040"/>
+            <a:ext cx="7863840" cy="548640"/>
+          </a:xfrm>
+          <a:prstGeom prst="rect">
+            <a:avLst/>
+          </a:prstGeom>
+          <a:noFill/>
+          <a:ln/>
+        </p:spPr>
+        <p:txBody>
+          <a:bodyPr wrap="square" rtlCol="0" anchor="ctr"/>
+          <a:lstStyle/>
+          <a:p>
+            <a:pPr indent="0" marL="0">
+              <a:buNone/>
+            </a:pPr>
+            <a:r>
+              <a:rPr lang="en-US" sz="3000" b="1" dirty="0">
+                <a:solidFill>
+                  <a:srgbClr val="FFFFFF"/>
+                </a:solidFill>
+                <a:latin typeface="Arial" pitchFamily="34" charset="0"/>
+                <a:ea typeface="Arial" pitchFamily="34" charset="-122"/>
+                <a:cs typeface="Arial" pitchFamily="34" charset="-120"/>
+              </a:rPr>
+              <a:t>Samenvatting</a:t>
+            </a:r>
+            <a:endParaRPr lang="en-US" sz="3000" dirty="0"/>
+          </a:p>
+        </p:txBody>
+      </p:sp>
+      <p:sp>
+        <p:nvSpPr>
+          <p:cNvPr id="3" name="Text 1"/>
+          <p:cNvSpPr/>
+          <p:nvPr/>
+        </p:nvSpPr>
+        <p:spPr>
+          <a:xfrm>
+            <a:off x="640080" y="868680"/>
+            <a:ext cx="7863840" cy="365760"/>
+          </a:xfrm>
+          <a:prstGeom prst="rect">
+            <a:avLst/>
+          </a:prstGeom>
+          <a:noFill/>
+          <a:ln/>
+        </p:spPr>
+        <p:txBody>
+          <a:bodyPr wrap="square" rtlCol="0" anchor="ctr"/>
+          <a:lstStyle/>
+          <a:p>
+            <a:pPr indent="0" marL="0">
+              <a:buNone/>
+            </a:pPr>
+            <a:r>
+              <a:rPr lang="en-US" sz="1400" i="1" dirty="0">
+                <a:solidFill>
+                  <a:srgbClr val="718096"/>
+                </a:solidFill>
+                <a:latin typeface="Arial" pitchFamily="34" charset="0"/>
+                <a:ea typeface="Arial" pitchFamily="34" charset="-122"/>
+                <a:cs typeface="Arial" pitchFamily="34" charset="-120"/>
+              </a:rPr>
+              <a:t>Check: beheers je dit voordat je gaat oefenen?</a:t>
+            </a:r>
+            <a:endParaRPr lang="en-US" sz="1400" dirty="0"/>
+          </a:p>
+        </p:txBody>
+      </p:sp>
+      <p:sp>
+        <p:nvSpPr>
+          <p:cNvPr id="4" name="Text 2"/>
+          <p:cNvSpPr/>
+          <p:nvPr/>
+        </p:nvSpPr>
+        <p:spPr>
+          <a:xfrm>
+            <a:off x="640080" y="1417320"/>
+            <a:ext cx="7863840" cy="3200400"/>
+          </a:xfrm>
+          <a:prstGeom prst="rect">
+            <a:avLst/>
+          </a:prstGeom>
+          <a:noFill/>
+          <a:ln/>
+        </p:spPr>
+        <p:txBody>
+          <a:bodyPr wrap="square" rtlCol="0" anchor="ctr"/>
+          <a:lstStyle/>
+          <a:p>
+            <a:pPr marL="342900" indent="-342900">
+              <a:lnSpc>
+                <a:spcPct val="125000"/>
+              </a:lnSpc>
+              <a:spcAft>
+                <a:spcPts val="800"/>
+              </a:spcAft>
+              <a:buSzPct val="100000"/>
+              <a:buChar char="■"/>
+            </a:pPr>
+            <a:r>
+              <a:rPr lang="en-US" sz="1500" dirty="0">
+                <a:solidFill>
+                  <a:srgbClr val="FFFFFF"/>
+                </a:solidFill>
+                <a:latin typeface="Arial" pitchFamily="34" charset="0"/>
+                <a:ea typeface="Arial" pitchFamily="34" charset="-122"/>
+                <a:cs typeface="Arial" pitchFamily="34" charset="-120"/>
+              </a:rPr>
+              <a:t>Collectief goed = niet-uitsluitbaar én niet-rivaliserend</a:t>
+            </a:r>
+            <a:endParaRPr lang="en-US" sz="1500" dirty="0"/>
+          </a:p>
+          <a:p>
+            <a:pPr marL="342900" indent="-342900">
+              <a:lnSpc>
+                <a:spcPct val="125000"/>
+              </a:lnSpc>
+              <a:spcAft>
+                <a:spcPts val="800"/>
+              </a:spcAft>
+              <a:buSzPct val="100000"/>
+              <a:buChar char="■"/>
+            </a:pPr>
+            <a:r>
+              <a:rPr lang="en-US" sz="1500" dirty="0">
+                <a:solidFill>
+                  <a:srgbClr val="FFFFFF"/>
+                </a:solidFill>
+                <a:latin typeface="Arial" pitchFamily="34" charset="0"/>
+                <a:ea typeface="Arial" pitchFamily="34" charset="-122"/>
+                <a:cs typeface="Arial" pitchFamily="34" charset="-120"/>
+              </a:rPr>
+              <a:t>Vier soorten goederen: privé ↔ club ↔ gemeenschappelijk ↔ collectief</a:t>
+            </a:r>
+            <a:endParaRPr lang="en-US" sz="1500" dirty="0"/>
+          </a:p>
+          <a:p>
+            <a:pPr marL="342900" indent="-342900">
+              <a:lnSpc>
+                <a:spcPct val="125000"/>
+              </a:lnSpc>
+              <a:spcAft>
+                <a:spcPts val="800"/>
+              </a:spcAft>
+              <a:buSzPct val="100000"/>
+              <a:buChar char="■"/>
+            </a:pPr>
+            <a:r>
+              <a:rPr lang="en-US" sz="1500" dirty="0">
+                <a:solidFill>
+                  <a:srgbClr val="FFFFFF"/>
+                </a:solidFill>
+                <a:latin typeface="Arial" pitchFamily="34" charset="0"/>
+                <a:ea typeface="Arial" pitchFamily="34" charset="-122"/>
+                <a:cs typeface="Arial" pitchFamily="34" charset="-120"/>
+              </a:rPr>
+              <a:t>Particuliere aanbieder kan geen winst maken op een collectief goed</a:t>
+            </a:r>
+            <a:endParaRPr lang="en-US" sz="1500" dirty="0"/>
+          </a:p>
+          <a:p>
+            <a:pPr marL="342900" indent="-342900">
+              <a:lnSpc>
+                <a:spcPct val="125000"/>
+              </a:lnSpc>
+              <a:spcAft>
+                <a:spcPts val="800"/>
+              </a:spcAft>
+              <a:buSzPct val="100000"/>
+              <a:buChar char="■"/>
+            </a:pPr>
+            <a:r>
+              <a:rPr lang="en-US" sz="1500" dirty="0">
+                <a:solidFill>
+                  <a:srgbClr val="FFFFFF"/>
+                </a:solidFill>
+                <a:latin typeface="Arial" pitchFamily="34" charset="0"/>
+                <a:ea typeface="Arial" pitchFamily="34" charset="-122"/>
+                <a:cs typeface="Arial" pitchFamily="34" charset="-120"/>
+              </a:rPr>
+              <a:t>Meelifter / free-rider: niemand wil als enige betalen</a:t>
+            </a:r>
+            <a:endParaRPr lang="en-US" sz="1500" dirty="0"/>
+          </a:p>
+          <a:p>
+            <a:pPr marL="342900" indent="-342900">
+              <a:lnSpc>
+                <a:spcPct val="125000"/>
+              </a:lnSpc>
+              <a:spcAft>
+                <a:spcPts val="800"/>
+              </a:spcAft>
+              <a:buSzPct val="100000"/>
+              <a:buChar char="■"/>
+            </a:pPr>
+            <a:r>
+              <a:rPr lang="en-US" sz="1500" dirty="0">
+                <a:solidFill>
+                  <a:srgbClr val="FFFFFF"/>
+                </a:solidFill>
+                <a:latin typeface="Arial" pitchFamily="34" charset="0"/>
+                <a:ea typeface="Arial" pitchFamily="34" charset="-122"/>
+                <a:cs typeface="Arial" pitchFamily="34" charset="-120"/>
+              </a:rPr>
+              <a:t>De overheid biedt collectieve goederen aan</a:t>
+            </a:r>
+            <a:endParaRPr lang="en-US" sz="1500" dirty="0"/>
+          </a:p>
+          <a:p>
+            <a:pPr marL="342900" indent="-342900">
+              <a:lnSpc>
+                <a:spcPct val="125000"/>
+              </a:lnSpc>
+              <a:spcAft>
+                <a:spcPts val="800"/>
+              </a:spcAft>
+              <a:buSzPct val="100000"/>
+              <a:buChar char="■"/>
+            </a:pPr>
+            <a:r>
+              <a:rPr lang="en-US" sz="1500" dirty="0">
+                <a:solidFill>
+                  <a:srgbClr val="FFFFFF"/>
+                </a:solidFill>
+                <a:latin typeface="Arial" pitchFamily="34" charset="0"/>
+                <a:ea typeface="Arial" pitchFamily="34" charset="-122"/>
+                <a:cs typeface="Arial" pitchFamily="34" charset="-120"/>
+              </a:rPr>
+              <a:t>Betaling via VERPLICHTE belasting — dat lost het free-riderprobleem op</a:t>
+            </a:r>
+            <a:endParaRPr lang="en-US" sz="1500" dirty="0"/>
+          </a:p>
+        </p:txBody>
+      </p:sp>
+    </p:spTree>
+  </p:cSld>
+  <p:clrMapOvr>
+    <a:masterClrMapping/>
+  </p:clrMapOvr>
+</p:sld>
+</file>
+
 <file path=ppt/slides/slide2.xml><?xml version="1.0" encoding="utf-8"?>
 <p:sld xmlns:a="http://schemas.openxmlformats.org/drawingml/2006/main" xmlns:r="http://schemas.openxmlformats.org/officeDocument/2006/relationships" xmlns:p="http://schemas.openxmlformats.org/presentationml/2006/main">
   <p:cSld name="Slide 2">
@@ -1806,8 +3507,8 @@
         </p:nvSpPr>
         <p:spPr>
           <a:xfrm>
-            <a:off x="457200" y="914400"/>
-            <a:ext cx="8229600" cy="365760"/>
+            <a:off x="640080" y="1051560"/>
+            <a:ext cx="7863840" cy="3291840"/>
           </a:xfrm>
           <a:prstGeom prst="rect">
             <a:avLst/>
@@ -1819,57 +3520,18 @@
           <a:bodyPr wrap="square" rtlCol="0" anchor="ctr"/>
           <a:lstStyle/>
           <a:p>
-            <a:pPr indent="0" marL="0">
-              <a:buNone/>
-            </a:pPr>
-            <a:r>
-              <a:rPr lang="en-US" sz="2000" b="1" dirty="0">
-                <a:solidFill>
-                  <a:srgbClr val="1A5276"/>
-                </a:solidFill>
-                <a:latin typeface="Arial" pitchFamily="34" charset="0"/>
-                <a:ea typeface="Arial" pitchFamily="34" charset="-122"/>
-                <a:cs typeface="Arial" pitchFamily="34" charset="-120"/>
-              </a:rPr>
-              <a:t>Leerdoelen</a:t>
-            </a:r>
-            <a:endParaRPr lang="en-US" sz="2000" dirty="0"/>
-          </a:p>
-        </p:txBody>
-      </p:sp>
-      <p:sp>
-        <p:nvSpPr>
-          <p:cNvPr id="4" name="Text 2"/>
-          <p:cNvSpPr/>
-          <p:nvPr/>
-        </p:nvSpPr>
-        <p:spPr>
-          <a:xfrm>
-            <a:off x="640080" y="1371600"/>
-            <a:ext cx="7863840" cy="2926080"/>
-          </a:xfrm>
-          <a:prstGeom prst="rect">
-            <a:avLst/>
-          </a:prstGeom>
-          <a:noFill/>
-          <a:ln/>
-        </p:spPr>
-        <p:txBody>
-          <a:bodyPr wrap="square" rtlCol="0" anchor="t"/>
-          <a:lstStyle/>
-          <a:p>
-            <a:pPr algn="l" marL="342900" indent="-342900">
+            <a:pPr marL="342900" indent="-342900">
               <a:lnSpc>
-                <a:spcPct val="150000"/>
+                <a:spcPct val="125000"/>
               </a:lnSpc>
               <a:spcAft>
-                <a:spcPts val="800"/>
+                <a:spcPts val="1000"/>
               </a:spcAft>
               <a:buSzPct val="100000"/>
-              <a:buChar char="•"/>
-            </a:pPr>
-            <a:r>
-              <a:rPr lang="en-US" sz="1500" dirty="0">
+              <a:buChar char="■"/>
+            </a:pPr>
+            <a:r>
+              <a:rPr lang="en-US" sz="1700" dirty="0">
                 <a:solidFill>
                   <a:srgbClr val="2D3748"/>
                 </a:solidFill>
@@ -1879,20 +3541,21 @@
               </a:rPr>
               <a:t>De twee eigenschappen van een collectief goed benoemen</a:t>
             </a:r>
-          </a:p>
-          <a:p>
-            <a:pPr algn="l" marL="342900" indent="-342900">
+            <a:endParaRPr lang="en-US" sz="1700" dirty="0"/>
+          </a:p>
+          <a:p>
+            <a:pPr marL="342900" indent="-342900">
               <a:lnSpc>
-                <a:spcPct val="150000"/>
+                <a:spcPct val="125000"/>
               </a:lnSpc>
               <a:spcAft>
-                <a:spcPts val="800"/>
+                <a:spcPts val="1000"/>
               </a:spcAft>
               <a:buSzPct val="100000"/>
-              <a:buChar char="•"/>
-            </a:pPr>
-            <a:r>
-              <a:rPr lang="en-US" sz="1500" dirty="0">
+              <a:buChar char="■"/>
+            </a:pPr>
+            <a:r>
+              <a:rPr lang="en-US" sz="1700" dirty="0">
                 <a:solidFill>
                   <a:srgbClr val="2D3748"/>
                 </a:solidFill>
@@ -1900,22 +3563,23 @@
                 <a:ea typeface="Arial" pitchFamily="34" charset="-122"/>
                 <a:cs typeface="Arial" pitchFamily="34" charset="-120"/>
               </a:rPr>
-              <a:t>Herkennen of iets een collectief goed is</a:t>
-            </a:r>
-          </a:p>
-          <a:p>
-            <a:pPr algn="l" marL="342900" indent="-342900">
+              <a:t>Onderscheid maken tussen privégoed, clubgoed, gemeenschappelijk goed en collectief goed</a:t>
+            </a:r>
+            <a:endParaRPr lang="en-US" sz="1700" dirty="0"/>
+          </a:p>
+          <a:p>
+            <a:pPr marL="342900" indent="-342900">
               <a:lnSpc>
-                <a:spcPct val="150000"/>
+                <a:spcPct val="125000"/>
               </a:lnSpc>
               <a:spcAft>
-                <a:spcPts val="800"/>
+                <a:spcPts val="1000"/>
               </a:spcAft>
               <a:buSzPct val="100000"/>
-              <a:buChar char="•"/>
-            </a:pPr>
-            <a:r>
-              <a:rPr lang="en-US" sz="1500" dirty="0">
+              <a:buChar char="■"/>
+            </a:pPr>
+            <a:r>
+              <a:rPr lang="en-US" sz="1700" dirty="0">
                 <a:solidFill>
                   <a:srgbClr val="2D3748"/>
                 </a:solidFill>
@@ -1923,22 +3587,23 @@
                 <a:ea typeface="Arial" pitchFamily="34" charset="-122"/>
                 <a:cs typeface="Arial" pitchFamily="34" charset="-120"/>
               </a:rPr>
-              <a:t>Uitleggen waarom de markt collectieve goederen niet levert</a:t>
-            </a:r>
-          </a:p>
-          <a:p>
-            <a:pPr algn="l" marL="342900" indent="-342900">
+              <a:t>Herkennen of iets een collectief goed is (beslisboom)</a:t>
+            </a:r>
+            <a:endParaRPr lang="en-US" sz="1700" dirty="0"/>
+          </a:p>
+          <a:p>
+            <a:pPr marL="342900" indent="-342900">
               <a:lnSpc>
-                <a:spcPct val="150000"/>
+                <a:spcPct val="125000"/>
               </a:lnSpc>
               <a:spcAft>
-                <a:spcPts val="800"/>
+                <a:spcPts val="1000"/>
               </a:spcAft>
               <a:buSzPct val="100000"/>
-              <a:buChar char="•"/>
-            </a:pPr>
-            <a:r>
-              <a:rPr lang="en-US" sz="1500" dirty="0">
+              <a:buChar char="■"/>
+            </a:pPr>
+            <a:r>
+              <a:rPr lang="en-US" sz="1700" dirty="0">
                 <a:solidFill>
                   <a:srgbClr val="2D3748"/>
                 </a:solidFill>
@@ -1946,8 +3611,33 @@
                 <a:ea typeface="Arial" pitchFamily="34" charset="-122"/>
                 <a:cs typeface="Arial" pitchFamily="34" charset="-120"/>
               </a:rPr>
-              <a:t>Het meeliftgedrag verklaren</a:t>
-            </a:r>
+              <a:t>Uitleggen waarom de markt collectieve goederen niet levert</a:t>
+            </a:r>
+            <a:endParaRPr lang="en-US" sz="1700" dirty="0"/>
+          </a:p>
+          <a:p>
+            <a:pPr marL="342900" indent="-342900">
+              <a:lnSpc>
+                <a:spcPct val="125000"/>
+              </a:lnSpc>
+              <a:spcAft>
+                <a:spcPts val="1000"/>
+              </a:spcAft>
+              <a:buSzPct val="100000"/>
+              <a:buChar char="■"/>
+            </a:pPr>
+            <a:r>
+              <a:rPr lang="en-US" sz="1700" dirty="0">
+                <a:solidFill>
+                  <a:srgbClr val="2D3748"/>
+                </a:solidFill>
+                <a:latin typeface="Arial" pitchFamily="34" charset="0"/>
+                <a:ea typeface="Arial" pitchFamily="34" charset="-122"/>
+                <a:cs typeface="Arial" pitchFamily="34" charset="-120"/>
+              </a:rPr>
+              <a:t>Het meeliftgedrag (free-riderprobleem) verklaren</a:t>
+            </a:r>
+            <a:endParaRPr lang="en-US" sz="1700" dirty="0"/>
           </a:p>
         </p:txBody>
       </p:sp>
@@ -2009,7 +3699,7 @@
                 <a:ea typeface="Arial" pitchFamily="34" charset="-122"/>
                 <a:cs typeface="Arial" pitchFamily="34" charset="-120"/>
               </a:rPr>
-              <a:t>Twee eigenschappen</a:t>
+              <a:t>Twee eigenschappen definiëren een collectief goed</a:t>
             </a:r>
             <a:endParaRPr lang="en-US" sz="2400" dirty="0"/>
           </a:p>
@@ -2023,16 +3713,16 @@
         </p:nvSpPr>
         <p:spPr>
           <a:xfrm>
-            <a:off x="457200" y="1005840"/>
-            <a:ext cx="3931920" cy="2560320"/>
+            <a:off x="457200" y="960120"/>
+            <a:ext cx="3931920" cy="3566160"/>
           </a:xfrm>
           <a:prstGeom prst="rect">
             <a:avLst>
-              <a:gd name="adj" fmla="val 1786"/>
+              <a:gd name="adj" fmla="val 1282"/>
             </a:avLst>
           </a:prstGeom>
           <a:solidFill>
-            <a:srgbClr val="F9F6F1"/>
+            <a:srgbClr val="EBF5FB"/>
           </a:solidFill>
           <a:ln/>
           <a:effectLst>
@@ -2043,10 +3733,6 @@
             </a:outerShdw>
           </a:effectLst>
         </p:spPr>
-        <p:txBody>
-          <a:bodyPr/>
-          <a:p/>
-        </p:txBody>
       </p:sp>
       <p:sp>
         <p:nvSpPr>
@@ -2056,8 +3742,8 @@
         </p:nvSpPr>
         <p:spPr>
           <a:xfrm>
-            <a:off x="457200" y="1005840"/>
-            <a:ext cx="54864" cy="2560320"/>
+            <a:off x="457200" y="960120"/>
+            <a:ext cx="54864" cy="3566160"/>
           </a:xfrm>
           <a:prstGeom prst="rect">
             <a:avLst/>
@@ -2067,10 +3753,6 @@
           </a:solidFill>
           <a:ln/>
         </p:spPr>
-        <p:txBody>
-          <a:bodyPr/>
-          <a:p/>
-        </p:txBody>
       </p:sp>
       <p:sp>
         <p:nvSpPr>
@@ -2080,7 +3762,7 @@
         </p:nvSpPr>
         <p:spPr>
           <a:xfrm>
-            <a:off x="640080" y="1143000"/>
+            <a:off x="640080" y="1069848"/>
             <a:ext cx="3611880" cy="365760"/>
           </a:xfrm>
           <a:prstGeom prst="rect">
@@ -2090,24 +3772,24 @@
           <a:ln/>
         </p:spPr>
         <p:txBody>
-          <a:bodyPr wrap="square" rtlCol="0" anchor="t"/>
+          <a:bodyPr wrap="square" lIns="0" tIns="0" rIns="0" bIns="0" rtlCol="0" anchor="t"/>
           <a:lstStyle/>
           <a:p>
             <a:pPr indent="0" marL="0">
               <a:buNone/>
             </a:pPr>
             <a:r>
-              <a:rPr lang="en-US" sz="2000" b="1" dirty="0">
-                <a:solidFill>
-                  <a:srgbClr val="1A5276"/>
-                </a:solidFill>
-                <a:latin typeface="Arial" pitchFamily="34" charset="0"/>
-                <a:ea typeface="Arial" pitchFamily="34" charset="-122"/>
-                <a:cs typeface="Arial" pitchFamily="34" charset="-120"/>
-              </a:rPr>
-              <a:t>Niet-uitsluitbaar</a:t>
-            </a:r>
-            <a:endParaRPr lang="en-US" sz="2000" dirty="0"/>
+              <a:rPr lang="en-US" sz="1800" b="1" dirty="0">
+                <a:solidFill>
+                  <a:srgbClr val="154360"/>
+                </a:solidFill>
+                <a:latin typeface="Arial" pitchFamily="34" charset="0"/>
+                <a:ea typeface="Arial" pitchFamily="34" charset="-122"/>
+                <a:cs typeface="Arial" pitchFamily="34" charset="-120"/>
+              </a:rPr>
+              <a:t>1. Niet-uitsluitbaar</a:t>
+            </a:r>
+            <a:endParaRPr lang="en-US" sz="1800" dirty="0"/>
           </a:p>
         </p:txBody>
       </p:sp>
@@ -2119,8 +3801,8 @@
         </p:nvSpPr>
         <p:spPr>
           <a:xfrm>
-            <a:off x="640080" y="1554480"/>
-            <a:ext cx="3611880" cy="1874520"/>
+            <a:off x="640080" y="1463040"/>
+            <a:ext cx="3611880" cy="2926080"/>
           </a:xfrm>
           <a:prstGeom prst="rect">
             <a:avLst/>
@@ -2129,17 +3811,17 @@
           <a:ln/>
         </p:spPr>
         <p:txBody>
-          <a:bodyPr wrap="square" rtlCol="0" anchor="t"/>
+          <a:bodyPr wrap="square" lIns="0" tIns="0" rIns="0" bIns="0" rtlCol="0" anchor="t"/>
           <a:lstStyle/>
           <a:p>
             <a:pPr algn="l" indent="0" marL="0">
               <a:lnSpc>
-                <a:spcPct val="115000"/>
+                <a:spcPct val="120000"/>
               </a:lnSpc>
               <a:buNone/>
             </a:pPr>
             <a:r>
-              <a:rPr lang="en-US" sz="1400" dirty="0">
+              <a:rPr lang="en-US" sz="1300" b="1" dirty="0">
                 <a:solidFill>
                   <a:srgbClr val="2D3748"/>
                 </a:solidFill>
@@ -2147,17 +3829,19 @@
                 <a:ea typeface="Arial" pitchFamily="34" charset="-122"/>
                 <a:cs typeface="Arial" pitchFamily="34" charset="-120"/>
               </a:rPr>
-              <a:t>Je kunt niemand uitsluiten van het gebruik.
-</a:t>
-            </a:r>
+              <a:t>Je kunt niemand uitsluiten van het gebruik.</a:t>
+            </a:r>
+            <a:endParaRPr lang="en-US" sz="1300" dirty="0"/>
+          </a:p>
+          <a:p>
             <a:pPr algn="l" indent="0" marL="0">
               <a:lnSpc>
-                <a:spcPct val="115000"/>
+                <a:spcPct val="120000"/>
               </a:lnSpc>
               <a:buNone/>
             </a:pPr>
             <a:r>
-              <a:rPr lang="en-US" sz="1400" b="1" dirty="0">
+              <a:rPr lang="en-US" sz="1300" dirty="0">
                 <a:solidFill>
                   <a:srgbClr val="2D3748"/>
                 </a:solidFill>
@@ -2165,9 +3849,38 @@
                 <a:ea typeface="Arial" pitchFamily="34" charset="-122"/>
                 <a:cs typeface="Arial" pitchFamily="34" charset="-120"/>
               </a:rPr>
-              <a:t>Iedereen profiteert, ook wie niet betaalt.</a:t>
-            </a:r>
-            <a:endParaRPr lang="en-US" sz="1400" dirty="0"/>
+              <a:t>Iedereen profiteert — ook wie niet betaalt.</a:t>
+            </a:r>
+            <a:endParaRPr lang="en-US" sz="1300" dirty="0"/>
+          </a:p>
+          <a:p>
+            <a:pPr algn="l" indent="0" marL="0">
+              <a:lnSpc>
+                <a:spcPct val="120000"/>
+              </a:lnSpc>
+              <a:buNone/>
+            </a:pPr>
+            <a:endParaRPr lang="en-US" sz="1300" dirty="0"/>
+          </a:p>
+          <a:p>
+            <a:pPr algn="l" indent="0" marL="0">
+              <a:lnSpc>
+                <a:spcPct val="120000"/>
+              </a:lnSpc>
+              <a:buNone/>
+            </a:pPr>
+            <a:r>
+              <a:rPr lang="en-US" sz="1200" i="1" dirty="0">
+                <a:solidFill>
+                  <a:srgbClr val="718096"/>
+                </a:solidFill>
+                <a:latin typeface="Arial" pitchFamily="34" charset="0"/>
+                <a:ea typeface="Arial" pitchFamily="34" charset="-122"/>
+                <a:cs typeface="Arial" pitchFamily="34" charset="-120"/>
+              </a:rPr>
+              <a:t>Voorbeeld: een dijk beschermt het hele dorp — je kunt niet tegen één bewoner zeggen: “voor jou doet íe het niet”.</a:t>
+            </a:r>
+            <a:endParaRPr lang="en-US" sz="1300" dirty="0"/>
           </a:p>
         </p:txBody>
       </p:sp>
@@ -2179,16 +3892,16 @@
         </p:nvSpPr>
         <p:spPr>
           <a:xfrm>
-            <a:off x="4754880" y="1005840"/>
-            <a:ext cx="3931920" cy="2560320"/>
+            <a:off x="4754880" y="960120"/>
+            <a:ext cx="3931920" cy="3566160"/>
           </a:xfrm>
           <a:prstGeom prst="rect">
             <a:avLst>
-              <a:gd name="adj" fmla="val 1786"/>
+              <a:gd name="adj" fmla="val 1282"/>
             </a:avLst>
           </a:prstGeom>
           <a:solidFill>
-            <a:srgbClr val="F9F6F1"/>
+            <a:srgbClr val="E8F8F0"/>
           </a:solidFill>
           <a:ln/>
           <a:effectLst>
@@ -2199,10 +3912,6 @@
             </a:outerShdw>
           </a:effectLst>
         </p:spPr>
-        <p:txBody>
-          <a:bodyPr/>
-          <a:p/>
-        </p:txBody>
       </p:sp>
       <p:sp>
         <p:nvSpPr>
@@ -2212,21 +3921,17 @@
         </p:nvSpPr>
         <p:spPr>
           <a:xfrm>
-            <a:off x="4754880" y="1005840"/>
-            <a:ext cx="54864" cy="2560320"/>
+            <a:off x="4754880" y="960120"/>
+            <a:ext cx="54864" cy="3566160"/>
           </a:xfrm>
           <a:prstGeom prst="rect">
             <a:avLst/>
           </a:prstGeom>
           <a:solidFill>
-            <a:srgbClr val="1A5276"/>
+            <a:srgbClr val="186A3B"/>
           </a:solidFill>
           <a:ln/>
         </p:spPr>
-        <p:txBody>
-          <a:bodyPr/>
-          <a:p/>
-        </p:txBody>
       </p:sp>
       <p:sp>
         <p:nvSpPr>
@@ -2236,7 +3941,7 @@
         </p:nvSpPr>
         <p:spPr>
           <a:xfrm>
-            <a:off x="4937760" y="1143000"/>
+            <a:off x="4937760" y="1069848"/>
             <a:ext cx="3611880" cy="365760"/>
           </a:xfrm>
           <a:prstGeom prst="rect">
@@ -2246,24 +3951,24 @@
           <a:ln/>
         </p:spPr>
         <p:txBody>
-          <a:bodyPr wrap="square" rtlCol="0" anchor="t"/>
+          <a:bodyPr wrap="square" lIns="0" tIns="0" rIns="0" bIns="0" rtlCol="0" anchor="t"/>
           <a:lstStyle/>
           <a:p>
             <a:pPr indent="0" marL="0">
               <a:buNone/>
             </a:pPr>
             <a:r>
-              <a:rPr lang="en-US" sz="2000" b="1" dirty="0">
-                <a:solidFill>
-                  <a:srgbClr val="1A5276"/>
-                </a:solidFill>
-                <a:latin typeface="Arial" pitchFamily="34" charset="0"/>
-                <a:ea typeface="Arial" pitchFamily="34" charset="-122"/>
-                <a:cs typeface="Arial" pitchFamily="34" charset="-120"/>
-              </a:rPr>
-              <a:t>Niet-rivaliserend</a:t>
-            </a:r>
-            <a:endParaRPr lang="en-US" sz="2000" dirty="0"/>
+              <a:rPr lang="en-US" sz="1800" b="1" dirty="0">
+                <a:solidFill>
+                  <a:srgbClr val="186A3B"/>
+                </a:solidFill>
+                <a:latin typeface="Arial" pitchFamily="34" charset="0"/>
+                <a:ea typeface="Arial" pitchFamily="34" charset="-122"/>
+                <a:cs typeface="Arial" pitchFamily="34" charset="-120"/>
+              </a:rPr>
+              <a:t>2. Niet-rivaliserend</a:t>
+            </a:r>
+            <a:endParaRPr lang="en-US" sz="1800" dirty="0"/>
           </a:p>
         </p:txBody>
       </p:sp>
@@ -2275,8 +3980,8 @@
         </p:nvSpPr>
         <p:spPr>
           <a:xfrm>
-            <a:off x="4937760" y="1554480"/>
-            <a:ext cx="3611880" cy="1874520"/>
+            <a:off x="4937760" y="1463040"/>
+            <a:ext cx="3611880" cy="2926080"/>
           </a:xfrm>
           <a:prstGeom prst="rect">
             <a:avLst/>
@@ -2285,17 +3990,17 @@
           <a:ln/>
         </p:spPr>
         <p:txBody>
-          <a:bodyPr wrap="square" rtlCol="0" anchor="t"/>
+          <a:bodyPr wrap="square" lIns="0" tIns="0" rIns="0" bIns="0" rtlCol="0" anchor="t"/>
           <a:lstStyle/>
           <a:p>
             <a:pPr algn="l" indent="0" marL="0">
               <a:lnSpc>
-                <a:spcPct val="115000"/>
+                <a:spcPct val="120000"/>
               </a:lnSpc>
               <a:buNone/>
             </a:pPr>
             <a:r>
-              <a:rPr lang="en-US" sz="1400" dirty="0">
+              <a:rPr lang="en-US" sz="1300" b="1" dirty="0">
                 <a:solidFill>
                   <a:srgbClr val="2D3748"/>
                 </a:solidFill>
@@ -2303,17 +4008,19 @@
                 <a:ea typeface="Arial" pitchFamily="34" charset="-122"/>
                 <a:cs typeface="Arial" pitchFamily="34" charset="-120"/>
               </a:rPr>
-              <a:t>Het gebruik door de één gaat niet ten koste van de ander.
-</a:t>
-            </a:r>
+              <a:t>Gebruik door de één gaat niet ten koste van de ander.</a:t>
+            </a:r>
+            <a:endParaRPr lang="en-US" sz="1300" dirty="0"/>
+          </a:p>
+          <a:p>
             <a:pPr algn="l" indent="0" marL="0">
               <a:lnSpc>
-                <a:spcPct val="115000"/>
+                <a:spcPct val="120000"/>
               </a:lnSpc>
               <a:buNone/>
             </a:pPr>
             <a:r>
-              <a:rPr lang="en-US" sz="1400" b="1" dirty="0">
+              <a:rPr lang="en-US" sz="1300" dirty="0">
                 <a:solidFill>
                   <a:srgbClr val="2D3748"/>
                 </a:solidFill>
@@ -2323,94 +4030,34 @@
               </a:rPr>
               <a:t>Meer gebruikers = geen extra kosten.</a:t>
             </a:r>
-            <a:endParaRPr lang="en-US" sz="1400" dirty="0"/>
-          </a:p>
-        </p:txBody>
-      </p:sp>
-      <p:sp>
-        <p:nvSpPr>
-          <p:cNvPr id="11" name="Shape 9"/>
-          <p:cNvSpPr/>
-          <p:nvPr/>
-        </p:nvSpPr>
-        <p:spPr>
-          <a:xfrm>
-            <a:off x="457200" y="3840480"/>
-            <a:ext cx="8229600" cy="457200"/>
-          </a:xfrm>
-          <a:prstGeom prst="rect">
-            <a:avLst>
-              <a:gd name="adj" fmla="val 10000"/>
-            </a:avLst>
-          </a:prstGeom>
-          <a:solidFill>
-            <a:srgbClr val="EBF5FB"/>
-          </a:solidFill>
-          <a:ln/>
-        </p:spPr>
-        <p:txBody>
-          <a:bodyPr/>
-          <a:p/>
-        </p:txBody>
-      </p:sp>
-      <p:sp>
-        <p:nvSpPr>
-          <p:cNvPr id="12" name="Shape 10"/>
-          <p:cNvSpPr/>
-          <p:nvPr/>
-        </p:nvSpPr>
-        <p:spPr>
-          <a:xfrm>
-            <a:off x="457200" y="3840480"/>
-            <a:ext cx="54864" cy="457200"/>
-          </a:xfrm>
-          <a:prstGeom prst="rect">
-            <a:avLst/>
-          </a:prstGeom>
-          <a:solidFill>
-            <a:srgbClr val="1A5276"/>
-          </a:solidFill>
-          <a:ln/>
-        </p:spPr>
-        <p:txBody>
-          <a:bodyPr/>
-          <a:p/>
-        </p:txBody>
-      </p:sp>
-      <p:sp>
-        <p:nvSpPr>
-          <p:cNvPr id="13" name="Text 11"/>
-          <p:cNvSpPr/>
-          <p:nvPr/>
-        </p:nvSpPr>
-        <p:spPr>
-          <a:xfrm>
-            <a:off x="640080" y="3840480"/>
-            <a:ext cx="7863840" cy="457200"/>
-          </a:xfrm>
-          <a:prstGeom prst="rect">
-            <a:avLst/>
-          </a:prstGeom>
-          <a:noFill/>
-          <a:ln/>
-        </p:spPr>
-        <p:txBody>
-          <a:bodyPr wrap="square" rtlCol="0" anchor="ctr"/>
-          <a:lstStyle/>
-          <a:p>
-            <a:pPr indent="0" marL="0">
+            <a:endParaRPr lang="en-US" sz="1300" dirty="0"/>
+          </a:p>
+          <a:p>
+            <a:pPr algn="l" indent="0" marL="0">
+              <a:lnSpc>
+                <a:spcPct val="120000"/>
+              </a:lnSpc>
               <a:buNone/>
             </a:pPr>
-            <a:r>
-              <a:rPr lang="en-US" sz="1300" i="1" dirty="0">
-                <a:solidFill>
-                  <a:srgbClr val="154360"/>
-                </a:solidFill>
-                <a:latin typeface="Arial" pitchFamily="34" charset="0"/>
-                <a:ea typeface="Arial" pitchFamily="34" charset="-122"/>
-                <a:cs typeface="Arial" pitchFamily="34" charset="-120"/>
-              </a:rPr>
-              <a:t>Voorbeeld: de dijkbescherming beschermt iedereen, zonder dat je er iemand van kunt uitsluiten.</a:t>
+            <a:endParaRPr lang="en-US" sz="1300" dirty="0"/>
+          </a:p>
+          <a:p>
+            <a:pPr algn="l" indent="0" marL="0">
+              <a:lnSpc>
+                <a:spcPct val="120000"/>
+              </a:lnSpc>
+              <a:buNone/>
+            </a:pPr>
+            <a:r>
+              <a:rPr lang="en-US" sz="1200" i="1" dirty="0">
+                <a:solidFill>
+                  <a:srgbClr val="718096"/>
+                </a:solidFill>
+                <a:latin typeface="Arial" pitchFamily="34" charset="0"/>
+                <a:ea typeface="Arial" pitchFamily="34" charset="-122"/>
+                <a:cs typeface="Arial" pitchFamily="34" charset="-120"/>
+              </a:rPr>
+              <a:t>Voorbeeld: of er nu 100 of 10.000 mensen achter de dijk wonen, de kosten van de dijk veranderen niet.</a:t>
             </a:r>
             <a:endParaRPr lang="en-US" sz="1300" dirty="0"/>
           </a:p>
@@ -2474,513 +4121,36 @@
                 <a:ea typeface="Arial" pitchFamily="34" charset="-122"/>
                 <a:cs typeface="Arial" pitchFamily="34" charset="-120"/>
               </a:rPr>
-              <a:t>Wel of geen collectief goed?</a:t>
+              <a:t>De 2×2 matrix — vier soorten goederen</a:t>
             </a:r>
             <a:endParaRPr lang="en-US" sz="2400" dirty="0"/>
           </a:p>
         </p:txBody>
       </p:sp>
-      <p:sp>
-        <p:nvSpPr>
-          <p:cNvPr id="3" name="Shape 1"/>
-          <p:cNvSpPr/>
-          <p:nvPr/>
-        </p:nvSpPr>
-        <p:spPr>
-          <a:xfrm>
-            <a:off x="457200" y="1005840"/>
-            <a:ext cx="3931920" cy="3108960"/>
-          </a:xfrm>
-          <a:prstGeom prst="rect">
-            <a:avLst>
-              <a:gd name="adj" fmla="val 1471"/>
-            </a:avLst>
-          </a:prstGeom>
-          <a:solidFill>
-            <a:srgbClr val="E8F8F0"/>
-          </a:solidFill>
-          <a:ln/>
-          <a:effectLst>
-            <a:outerShdw sx="100000" sy="100000" kx="0" ky="0" algn="bl" rotWithShape="0" blurRad="76200" dist="25400" dir="8100000">
-              <a:srgbClr val="000000">
-                <a:alpha val="10000"/>
-              </a:srgbClr>
-            </a:outerShdw>
-          </a:effectLst>
-        </p:spPr>
-        <p:txBody>
-          <a:bodyPr/>
-          <a:p/>
-        </p:txBody>
-      </p:sp>
-      <p:sp>
-        <p:nvSpPr>
-          <p:cNvPr id="4" name="Shape 2"/>
-          <p:cNvSpPr/>
-          <p:nvPr/>
-        </p:nvSpPr>
-        <p:spPr>
-          <a:xfrm>
-            <a:off x="457200" y="1005840"/>
-            <a:ext cx="54864" cy="3108960"/>
-          </a:xfrm>
-          <a:prstGeom prst="rect">
-            <a:avLst/>
-          </a:prstGeom>
-          <a:solidFill>
-            <a:srgbClr val="1E8449"/>
-          </a:solidFill>
-          <a:ln/>
-        </p:spPr>
-        <p:txBody>
-          <a:bodyPr/>
-          <a:p/>
-        </p:txBody>
-      </p:sp>
-      <p:sp>
-        <p:nvSpPr>
-          <p:cNvPr id="5" name="Text 3"/>
-          <p:cNvSpPr/>
-          <p:nvPr/>
-        </p:nvSpPr>
-        <p:spPr>
-          <a:xfrm>
-            <a:off x="640080" y="1143000"/>
-            <a:ext cx="3611880" cy="365760"/>
-          </a:xfrm>
-          <a:prstGeom prst="rect">
-            <a:avLst/>
-          </a:prstGeom>
-          <a:noFill/>
-          <a:ln/>
-        </p:spPr>
-        <p:txBody>
-          <a:bodyPr wrap="square" rtlCol="0" anchor="t"/>
-          <a:lstStyle/>
-          <a:p>
-            <a:pPr indent="0" marL="0">
-              <a:buNone/>
-            </a:pPr>
-            <a:r>
-              <a:rPr lang="en-US" sz="2000" b="1" dirty="0">
-                <a:solidFill>
-                  <a:srgbClr val="1E8449"/>
-                </a:solidFill>
-                <a:latin typeface="Arial" pitchFamily="34" charset="0"/>
-                <a:ea typeface="Arial" pitchFamily="34" charset="-122"/>
-                <a:cs typeface="Arial" pitchFamily="34" charset="-120"/>
-              </a:rPr>
-              <a:t>Wel collectief goed</a:t>
-            </a:r>
-            <a:endParaRPr lang="en-US" sz="2000" dirty="0"/>
-          </a:p>
-        </p:txBody>
-      </p:sp>
-      <p:sp>
-        <p:nvSpPr>
-          <p:cNvPr id="6" name="Text 4"/>
-          <p:cNvSpPr/>
-          <p:nvPr/>
-        </p:nvSpPr>
-        <p:spPr>
-          <a:xfrm>
-            <a:off x="640080" y="1554480"/>
-            <a:ext cx="3611880" cy="2423160"/>
-          </a:xfrm>
-          <a:prstGeom prst="rect">
-            <a:avLst/>
-          </a:prstGeom>
-          <a:noFill/>
-          <a:ln/>
-        </p:spPr>
-        <p:txBody>
-          <a:bodyPr wrap="square" rtlCol="0" anchor="t"/>
-          <a:lstStyle/>
-          <a:p>
-            <a:pPr algn="l" marL="342900" indent="-342900">
-              <a:lnSpc>
-                <a:spcPct val="115000"/>
-              </a:lnSpc>
-              <a:buSzPct val="100000"/>
-              <a:buChar char="•"/>
-            </a:pPr>
-            <a:r>
-              <a:rPr lang="en-US" sz="1400" dirty="0">
-                <a:solidFill>
-                  <a:srgbClr val="2D3748"/>
-                </a:solidFill>
-                <a:latin typeface="Arial" pitchFamily="34" charset="0"/>
-                <a:ea typeface="Arial" pitchFamily="34" charset="-122"/>
-                <a:cs typeface="Arial" pitchFamily="34" charset="-120"/>
-              </a:rPr>
-              <a:t>Politiesurveillance</a:t>
-            </a:r>
-            <a:pPr algn="l" marL="342900" indent="-342900">
-              <a:lnSpc>
-                <a:spcPct val="115000"/>
-              </a:lnSpc>
-              <a:buSzPct val="100000"/>
-              <a:buChar char="•"/>
-            </a:pPr>
-            <a:endParaRPr lang="en-US" sz="1400" dirty="0"/>
-          </a:p>
-          <a:p>
-            <a:pPr algn="l" marL="342900" indent="-342900">
-              <a:lnSpc>
-                <a:spcPct val="115000"/>
-              </a:lnSpc>
-              <a:buSzPct val="100000"/>
-              <a:buChar char="•"/>
-            </a:pPr>
-            <a:r>
-              <a:rPr lang="en-US" sz="1400" dirty="0">
-                <a:solidFill>
-                  <a:srgbClr val="2D3748"/>
-                </a:solidFill>
-                <a:latin typeface="Arial" pitchFamily="34" charset="0"/>
-                <a:ea typeface="Arial" pitchFamily="34" charset="-122"/>
-                <a:cs typeface="Arial" pitchFamily="34" charset="-120"/>
-              </a:rPr>
-              <a:t>Straatverlichting</a:t>
-            </a:r>
-            <a:endParaRPr lang="en-US" sz="1400" dirty="0"/>
-          </a:p>
-          <a:p>
-            <a:pPr algn="l" marL="342900" indent="-342900">
-              <a:lnSpc>
-                <a:spcPct val="115000"/>
-              </a:lnSpc>
-              <a:buSzPct val="100000"/>
-              <a:buChar char="•"/>
-            </a:pPr>
-            <a:endParaRPr lang="en-US" sz="1400" dirty="0"/>
-          </a:p>
-          <a:p>
-            <a:pPr algn="l" marL="342900" indent="-342900">
-              <a:lnSpc>
-                <a:spcPct val="115000"/>
-              </a:lnSpc>
-              <a:buSzPct val="100000"/>
-              <a:buChar char="•"/>
-            </a:pPr>
-            <a:r>
-              <a:rPr lang="en-US" sz="1400" dirty="0">
-                <a:solidFill>
-                  <a:srgbClr val="2D3748"/>
-                </a:solidFill>
-                <a:latin typeface="Arial" pitchFamily="34" charset="0"/>
-                <a:ea typeface="Arial" pitchFamily="34" charset="-122"/>
-                <a:cs typeface="Arial" pitchFamily="34" charset="-120"/>
-              </a:rPr>
-              <a:t>Dijkbescherming</a:t>
-            </a:r>
-            <a:endParaRPr lang="en-US" sz="1400" dirty="0"/>
-          </a:p>
-          <a:p>
-            <a:pPr algn="l" marL="342900" indent="-342900">
-              <a:lnSpc>
-                <a:spcPct val="115000"/>
-              </a:lnSpc>
-              <a:buSzPct val="100000"/>
-              <a:buChar char="•"/>
-            </a:pPr>
-            <a:endParaRPr lang="en-US" sz="1400" dirty="0"/>
-          </a:p>
-          <a:p>
-            <a:pPr algn="l" marL="342900" indent="-342900">
-              <a:lnSpc>
-                <a:spcPct val="115000"/>
-              </a:lnSpc>
-              <a:buSzPct val="100000"/>
-              <a:buChar char="•"/>
-            </a:pPr>
-            <a:r>
-              <a:rPr lang="en-US" sz="1400" dirty="0">
-                <a:solidFill>
-                  <a:srgbClr val="2D3748"/>
-                </a:solidFill>
-                <a:latin typeface="Arial" pitchFamily="34" charset="0"/>
-                <a:ea typeface="Arial" pitchFamily="34" charset="-122"/>
-                <a:cs typeface="Arial" pitchFamily="34" charset="-120"/>
-              </a:rPr>
-              <a:t>Defensie (leger)</a:t>
-            </a:r>
-            <a:endParaRPr lang="en-US" sz="1400" dirty="0"/>
-          </a:p>
-        </p:txBody>
-      </p:sp>
-      <p:sp>
-        <p:nvSpPr>
-          <p:cNvPr id="7" name="Shape 5"/>
-          <p:cNvSpPr/>
-          <p:nvPr/>
-        </p:nvSpPr>
-        <p:spPr>
-          <a:xfrm>
-            <a:off x="4754880" y="1005840"/>
-            <a:ext cx="3931920" cy="3108960"/>
-          </a:xfrm>
-          <a:prstGeom prst="rect">
-            <a:avLst>
-              <a:gd name="adj" fmla="val 1471"/>
-            </a:avLst>
-          </a:prstGeom>
-          <a:solidFill>
-            <a:srgbClr val="FDE8E8"/>
-          </a:solidFill>
-          <a:ln/>
-          <a:effectLst>
-            <a:outerShdw sx="100000" sy="100000" kx="0" ky="0" algn="bl" rotWithShape="0" blurRad="76200" dist="25400" dir="8100000">
-              <a:srgbClr val="000000">
-                <a:alpha val="10000"/>
-              </a:srgbClr>
-            </a:outerShdw>
-          </a:effectLst>
-        </p:spPr>
-        <p:txBody>
-          <a:bodyPr/>
-          <a:p/>
-        </p:txBody>
-      </p:sp>
-      <p:sp>
-        <p:nvSpPr>
-          <p:cNvPr id="8" name="Shape 6"/>
-          <p:cNvSpPr/>
-          <p:nvPr/>
-        </p:nvSpPr>
-        <p:spPr>
-          <a:xfrm>
-            <a:off x="4754880" y="1005840"/>
-            <a:ext cx="54864" cy="3108960"/>
-          </a:xfrm>
-          <a:prstGeom prst="rect">
-            <a:avLst/>
-          </a:prstGeom>
-          <a:solidFill>
-            <a:srgbClr val="D9534F"/>
-          </a:solidFill>
-          <a:ln/>
-        </p:spPr>
-        <p:txBody>
-          <a:bodyPr/>
-          <a:p/>
-        </p:txBody>
-      </p:sp>
-      <p:sp>
-        <p:nvSpPr>
-          <p:cNvPr id="9" name="Text 7"/>
-          <p:cNvSpPr/>
-          <p:nvPr/>
-        </p:nvSpPr>
-        <p:spPr>
-          <a:xfrm>
-            <a:off x="4937760" y="1143000"/>
-            <a:ext cx="3611880" cy="365760"/>
-          </a:xfrm>
-          <a:prstGeom prst="rect">
-            <a:avLst/>
-          </a:prstGeom>
-          <a:noFill/>
-          <a:ln/>
-        </p:spPr>
-        <p:txBody>
-          <a:bodyPr wrap="square" rtlCol="0" anchor="t"/>
-          <a:lstStyle/>
-          <a:p>
-            <a:pPr indent="0" marL="0">
-              <a:buNone/>
-            </a:pPr>
-            <a:r>
-              <a:rPr lang="en-US" sz="2000" b="1" dirty="0">
-                <a:solidFill>
-                  <a:srgbClr val="D9534F"/>
-                </a:solidFill>
-                <a:latin typeface="Arial" pitchFamily="34" charset="0"/>
-                <a:ea typeface="Arial" pitchFamily="34" charset="-122"/>
-                <a:cs typeface="Arial" pitchFamily="34" charset="-120"/>
-              </a:rPr>
-              <a:t>Geen collectief goed</a:t>
-            </a:r>
-            <a:endParaRPr lang="en-US" sz="2000" dirty="0"/>
-          </a:p>
-        </p:txBody>
-      </p:sp>
-      <p:sp>
-        <p:nvSpPr>
-          <p:cNvPr id="10" name="Text 8"/>
-          <p:cNvSpPr/>
-          <p:nvPr/>
-        </p:nvSpPr>
-        <p:spPr>
-          <a:xfrm>
-            <a:off x="4937760" y="1554480"/>
-            <a:ext cx="3611880" cy="2423160"/>
-          </a:xfrm>
-          <a:prstGeom prst="rect">
-            <a:avLst/>
-          </a:prstGeom>
-          <a:noFill/>
-          <a:ln/>
-        </p:spPr>
-        <p:txBody>
-          <a:bodyPr wrap="square" rtlCol="0" anchor="t"/>
-          <a:lstStyle/>
-          <a:p>
-            <a:pPr algn="l" indent="0" marL="0">
-              <a:lnSpc>
-                <a:spcPct val="115000"/>
-              </a:lnSpc>
-              <a:buNone/>
-            </a:pPr>
-            <a:r>
-              <a:rPr lang="en-US" sz="1400" b="1" dirty="0">
-                <a:solidFill>
-                  <a:srgbClr val="2D3748"/>
-                </a:solidFill>
-                <a:latin typeface="Arial" pitchFamily="34" charset="0"/>
-                <a:ea typeface="Arial" pitchFamily="34" charset="-122"/>
-                <a:cs typeface="Arial" pitchFamily="34" charset="-120"/>
-              </a:rPr>
-              <a:t>Beveiligingsdienst</a:t>
-            </a:r>
-            <a:pPr algn="l" indent="0" marL="0">
-              <a:lnSpc>
-                <a:spcPct val="115000"/>
-              </a:lnSpc>
-              <a:buNone/>
-            </a:pPr>
-            <a:r>
-              <a:rPr lang="en-US" sz="1300" dirty="0">
-                <a:solidFill>
-                  <a:srgbClr val="718096"/>
-                </a:solidFill>
-                <a:latin typeface="Arial" pitchFamily="34" charset="0"/>
-                <a:ea typeface="Arial" pitchFamily="34" charset="-122"/>
-                <a:cs typeface="Arial" pitchFamily="34" charset="-120"/>
-              </a:rPr>
-              <a:t>
-uitsluitbaar: alleen klanten
-</a:t>
-            </a:r>
-            <a:pPr algn="l" indent="0" marL="0">
-              <a:lnSpc>
-                <a:spcPct val="115000"/>
-              </a:lnSpc>
-              <a:buNone/>
-            </a:pPr>
-            <a:r>
-              <a:rPr lang="en-US" sz="1400" b="1" dirty="0">
-                <a:solidFill>
-                  <a:srgbClr val="2D3748"/>
-                </a:solidFill>
-                <a:latin typeface="Arial" pitchFamily="34" charset="0"/>
-                <a:ea typeface="Arial" pitchFamily="34" charset="-122"/>
-                <a:cs typeface="Arial" pitchFamily="34" charset="-120"/>
-              </a:rPr>
-              <a:t>Privéonderwijs</a:t>
-            </a:r>
-            <a:pPr algn="l" indent="0" marL="0">
-              <a:lnSpc>
-                <a:spcPct val="115000"/>
-              </a:lnSpc>
-              <a:buNone/>
-            </a:pPr>
-            <a:r>
-              <a:rPr lang="en-US" sz="1300" dirty="0">
-                <a:solidFill>
-                  <a:srgbClr val="718096"/>
-                </a:solidFill>
-                <a:latin typeface="Arial" pitchFamily="34" charset="0"/>
-                <a:ea typeface="Arial" pitchFamily="34" charset="-122"/>
-                <a:cs typeface="Arial" pitchFamily="34" charset="-120"/>
-              </a:rPr>
-              <a:t>
-uitsluitbaar: collegegeld
-</a:t>
-            </a:r>
-            <a:pPr algn="l" indent="0" marL="0">
-              <a:lnSpc>
-                <a:spcPct val="115000"/>
-              </a:lnSpc>
-              <a:buNone/>
-            </a:pPr>
-            <a:r>
-              <a:rPr lang="en-US" sz="1400" b="1" dirty="0">
-                <a:solidFill>
-                  <a:srgbClr val="2D3748"/>
-                </a:solidFill>
-                <a:latin typeface="Arial" pitchFamily="34" charset="0"/>
-                <a:ea typeface="Arial" pitchFamily="34" charset="-122"/>
-                <a:cs typeface="Arial" pitchFamily="34" charset="-120"/>
-              </a:rPr>
-              <a:t>Huisarts</a:t>
-            </a:r>
-            <a:pPr algn="l" indent="0" marL="0">
-              <a:lnSpc>
-                <a:spcPct val="115000"/>
-              </a:lnSpc>
-              <a:buNone/>
-            </a:pPr>
-            <a:r>
-              <a:rPr lang="en-US" sz="1300" dirty="0">
-                <a:solidFill>
-                  <a:srgbClr val="718096"/>
-                </a:solidFill>
-                <a:latin typeface="Arial" pitchFamily="34" charset="0"/>
-                <a:ea typeface="Arial" pitchFamily="34" charset="-122"/>
-                <a:cs typeface="Arial" pitchFamily="34" charset="-120"/>
-              </a:rPr>
-              <a:t>
-rivaliserend: vol = vol
-</a:t>
-            </a:r>
-            <a:pPr algn="l" indent="0" marL="0">
-              <a:lnSpc>
-                <a:spcPct val="115000"/>
-              </a:lnSpc>
-              <a:buNone/>
-            </a:pPr>
-            <a:r>
-              <a:rPr lang="en-US" sz="1400" b="1" dirty="0">
-                <a:solidFill>
-                  <a:srgbClr val="2D3748"/>
-                </a:solidFill>
-                <a:latin typeface="Arial" pitchFamily="34" charset="0"/>
-                <a:ea typeface="Arial" pitchFamily="34" charset="-122"/>
-                <a:cs typeface="Arial" pitchFamily="34" charset="-120"/>
-              </a:rPr>
-              <a:t>Netflix-abonnement</a:t>
-            </a:r>
-            <a:pPr algn="l" indent="0" marL="0">
-              <a:lnSpc>
-                <a:spcPct val="115000"/>
-              </a:lnSpc>
-              <a:buNone/>
-            </a:pPr>
-            <a:endParaRPr lang="en-US" sz="1400" dirty="0"/>
-          </a:p>
-          <a:p>
-            <a:pPr algn="l" indent="0" marL="0">
-              <a:lnSpc>
-                <a:spcPct val="115000"/>
-              </a:lnSpc>
-              <a:buNone/>
-            </a:pPr>
-            <a:r>
-              <a:rPr lang="en-US" sz="1300" dirty="0">
-                <a:solidFill>
-                  <a:srgbClr val="718096"/>
-                </a:solidFill>
-                <a:latin typeface="Arial" pitchFamily="34" charset="0"/>
-                <a:ea typeface="Arial" pitchFamily="34" charset="-122"/>
-                <a:cs typeface="Arial" pitchFamily="34" charset="-120"/>
-              </a:rPr>
-              <a:t>uitsluitbaar: betaalmuur</a:t>
-            </a:r>
-            <a:endParaRPr lang="en-US" sz="1400" dirty="0"/>
-          </a:p>
-        </p:txBody>
-      </p:sp>
+      <p:pic>
+        <p:nvPicPr>
+          <p:cNvPr id="3" name="Image 0" descr="preencoded.png">    </p:cNvPr>
+          <p:cNvPicPr>
+            <a:picLocks noChangeAspect="1"/>
+          </p:cNvPicPr>
+          <p:nvPr/>
+        </p:nvPicPr>
+        <p:blipFill>
+          <a:blip r:embed="rId1"/>
+          <a:stretch>
+            <a:fillRect/>
+          </a:stretch>
+        </p:blipFill>
+        <p:spPr>
+          <a:xfrm>
+            <a:off x="685800" y="868680"/>
+            <a:ext cx="7772400" cy="3886200"/>
+          </a:xfrm>
+          <a:prstGeom prst="rect">
+            <a:avLst/>
+          </a:prstGeom>
+        </p:spPr>
+      </p:pic>
     </p:spTree>
   </p:cSld>
   <p:clrMapOvr>
@@ -3039,7 +4209,7 @@
                 <a:ea typeface="Arial" pitchFamily="34" charset="-122"/>
                 <a:cs typeface="Arial" pitchFamily="34" charset="-120"/>
               </a:rPr>
-              <a:t>Waarom faalt de markt?</a:t>
+              <a:t>Wel of geen collectief goed?</a:t>
             </a:r>
             <a:endParaRPr lang="en-US" sz="2400" dirty="0"/>
           </a:p>
@@ -3053,16 +4223,16 @@
         </p:nvSpPr>
         <p:spPr>
           <a:xfrm>
-            <a:off x="1371600" y="1097280"/>
-            <a:ext cx="6400800" cy="502920"/>
+            <a:off x="457200" y="960120"/>
+            <a:ext cx="3931920" cy="3566160"/>
           </a:xfrm>
           <a:prstGeom prst="rect">
             <a:avLst>
-              <a:gd name="adj" fmla="val 9091"/>
+              <a:gd name="adj" fmla="val 1282"/>
             </a:avLst>
           </a:prstGeom>
           <a:solidFill>
-            <a:srgbClr val="F9F6F1"/>
+            <a:srgbClr val="E8F8F0"/>
           </a:solidFill>
           <a:ln/>
           <a:effectLst>
@@ -3073,21 +4243,37 @@
             </a:outerShdw>
           </a:effectLst>
         </p:spPr>
-        <p:txBody>
-          <a:bodyPr/>
-          <a:p/>
-        </p:txBody>
-      </p:sp>
-      <p:sp>
-        <p:nvSpPr>
-          <p:cNvPr id="4" name="Text 2"/>
-          <p:cNvSpPr/>
-          <p:nvPr/>
-        </p:nvSpPr>
-        <p:spPr>
-          <a:xfrm>
-            <a:off x="1554480" y="1097280"/>
-            <a:ext cx="6035040" cy="502920"/>
+      </p:sp>
+      <p:sp>
+        <p:nvSpPr>
+          <p:cNvPr id="4" name="Shape 2"/>
+          <p:cNvSpPr/>
+          <p:nvPr/>
+        </p:nvSpPr>
+        <p:spPr>
+          <a:xfrm>
+            <a:off x="457200" y="960120"/>
+            <a:ext cx="54864" cy="3566160"/>
+          </a:xfrm>
+          <a:prstGeom prst="rect">
+            <a:avLst/>
+          </a:prstGeom>
+          <a:solidFill>
+            <a:srgbClr val="186A3B"/>
+          </a:solidFill>
+          <a:ln/>
+        </p:spPr>
+      </p:sp>
+      <p:sp>
+        <p:nvSpPr>
+          <p:cNvPr id="5" name="Text 3"/>
+          <p:cNvSpPr/>
+          <p:nvPr/>
+        </p:nvSpPr>
+        <p:spPr>
+          <a:xfrm>
+            <a:off x="640080" y="1069848"/>
+            <a:ext cx="3611880" cy="365760"/>
           </a:xfrm>
           <a:prstGeom prst="rect">
             <a:avLst/>
@@ -3096,14 +4282,57 @@
           <a:ln/>
         </p:spPr>
         <p:txBody>
-          <a:bodyPr wrap="square" rtlCol="0" anchor="ctr"/>
+          <a:bodyPr wrap="square" lIns="0" tIns="0" rIns="0" bIns="0" rtlCol="0" anchor="t"/>
           <a:lstStyle/>
           <a:p>
             <a:pPr indent="0" marL="0">
               <a:buNone/>
             </a:pPr>
             <a:r>
-              <a:rPr lang="en-US" sz="1500" dirty="0">
+              <a:rPr lang="en-US" sz="1800" b="1" dirty="0">
+                <a:solidFill>
+                  <a:srgbClr val="186A3B"/>
+                </a:solidFill>
+                <a:latin typeface="Arial" pitchFamily="34" charset="0"/>
+                <a:ea typeface="Arial" pitchFamily="34" charset="-122"/>
+                <a:cs typeface="Arial" pitchFamily="34" charset="-120"/>
+              </a:rPr>
+              <a:t>WEL collectief</a:t>
+            </a:r>
+            <a:endParaRPr lang="en-US" sz="1800" dirty="0"/>
+          </a:p>
+        </p:txBody>
+      </p:sp>
+      <p:sp>
+        <p:nvSpPr>
+          <p:cNvPr id="6" name="Text 4"/>
+          <p:cNvSpPr/>
+          <p:nvPr/>
+        </p:nvSpPr>
+        <p:spPr>
+          <a:xfrm>
+            <a:off x="640080" y="1463040"/>
+            <a:ext cx="3611880" cy="2926080"/>
+          </a:xfrm>
+          <a:prstGeom prst="rect">
+            <a:avLst/>
+          </a:prstGeom>
+          <a:noFill/>
+          <a:ln/>
+        </p:spPr>
+        <p:txBody>
+          <a:bodyPr wrap="square" lIns="0" tIns="0" rIns="0" bIns="0" rtlCol="0" anchor="t"/>
+          <a:lstStyle/>
+          <a:p>
+            <a:pPr algn="l" marL="342900" indent="-342900">
+              <a:lnSpc>
+                <a:spcPct val="120000"/>
+              </a:lnSpc>
+              <a:buSzPct val="100000"/>
+              <a:buChar char="■"/>
+            </a:pPr>
+            <a:r>
+              <a:rPr lang="en-US" sz="1300" b="1" dirty="0">
                 <a:solidFill>
                   <a:srgbClr val="2D3748"/>
                 </a:solidFill>
@@ -3111,30 +4340,113 @@
                 <a:ea typeface="Arial" pitchFamily="34" charset="-122"/>
                 <a:cs typeface="Arial" pitchFamily="34" charset="-120"/>
               </a:rPr>
-              <a:t>Collectief goed is niet-uitsluitbaar</a:t>
-            </a:r>
-            <a:endParaRPr lang="en-US" sz="1500" dirty="0"/>
-          </a:p>
-        </p:txBody>
-      </p:sp>
-      <p:sp>
-        <p:nvSpPr>
-          <p:cNvPr id="5" name="Shape 3"/>
-          <p:cNvSpPr/>
-          <p:nvPr/>
-        </p:nvSpPr>
-        <p:spPr>
-          <a:xfrm>
-            <a:off x="1371600" y="1709928"/>
-            <a:ext cx="6400800" cy="502920"/>
+              <a:t>Politiesurveillance</a:t>
+            </a:r>
+            <a:endParaRPr lang="en-US" sz="1300" dirty="0"/>
+          </a:p>
+          <a:p>
+            <a:pPr algn="l" marL="342900" indent="-342900">
+              <a:lnSpc>
+                <a:spcPct val="120000"/>
+              </a:lnSpc>
+              <a:buSzPct val="100000"/>
+              <a:buChar char="■"/>
+            </a:pPr>
+            <a:r>
+              <a:rPr lang="en-US" sz="1300" b="1" dirty="0">
+                <a:solidFill>
+                  <a:srgbClr val="2D3748"/>
+                </a:solidFill>
+                <a:latin typeface="Arial" pitchFamily="34" charset="0"/>
+                <a:ea typeface="Arial" pitchFamily="34" charset="-122"/>
+                <a:cs typeface="Arial" pitchFamily="34" charset="-120"/>
+              </a:rPr>
+              <a:t>Straatverlichting</a:t>
+            </a:r>
+            <a:endParaRPr lang="en-US" sz="1300" dirty="0"/>
+          </a:p>
+          <a:p>
+            <a:pPr algn="l" marL="342900" indent="-342900">
+              <a:lnSpc>
+                <a:spcPct val="120000"/>
+              </a:lnSpc>
+              <a:buSzPct val="100000"/>
+              <a:buChar char="■"/>
+            </a:pPr>
+            <a:r>
+              <a:rPr lang="en-US" sz="1300" b="1" dirty="0">
+                <a:solidFill>
+                  <a:srgbClr val="2D3748"/>
+                </a:solidFill>
+                <a:latin typeface="Arial" pitchFamily="34" charset="0"/>
+                <a:ea typeface="Arial" pitchFamily="34" charset="-122"/>
+                <a:cs typeface="Arial" pitchFamily="34" charset="-120"/>
+              </a:rPr>
+              <a:t>Dijken</a:t>
+            </a:r>
+            <a:endParaRPr lang="en-US" sz="1300" dirty="0"/>
+          </a:p>
+          <a:p>
+            <a:pPr algn="l" marL="342900" indent="-342900">
+              <a:lnSpc>
+                <a:spcPct val="120000"/>
+              </a:lnSpc>
+              <a:buSzPct val="100000"/>
+              <a:buChar char="■"/>
+            </a:pPr>
+            <a:r>
+              <a:rPr lang="en-US" sz="1300" b="1" dirty="0">
+                <a:solidFill>
+                  <a:srgbClr val="2D3748"/>
+                </a:solidFill>
+                <a:latin typeface="Arial" pitchFamily="34" charset="0"/>
+                <a:ea typeface="Arial" pitchFamily="34" charset="-122"/>
+                <a:cs typeface="Arial" pitchFamily="34" charset="-120"/>
+              </a:rPr>
+              <a:t>Defensie</a:t>
+            </a:r>
+            <a:endParaRPr lang="en-US" sz="1300" dirty="0"/>
+          </a:p>
+          <a:p>
+            <a:pPr algn="l" indent="0" marL="0">
+              <a:lnSpc>
+                <a:spcPct val="120000"/>
+              </a:lnSpc>
+              <a:buNone/>
+            </a:pPr>
+            <a:r>
+              <a:rPr lang="en-US" sz="1200" i="1" dirty="0">
+                <a:solidFill>
+                  <a:srgbClr val="718096"/>
+                </a:solidFill>
+                <a:latin typeface="Arial" pitchFamily="34" charset="0"/>
+                <a:ea typeface="Arial" pitchFamily="34" charset="-122"/>
+                <a:cs typeface="Arial" pitchFamily="34" charset="-120"/>
+              </a:rPr>
+              <a:t>→ niet-uitsluitbaar én niet-rivaliserend</a:t>
+            </a:r>
+            <a:endParaRPr lang="en-US" sz="1300" dirty="0"/>
+          </a:p>
+        </p:txBody>
+      </p:sp>
+      <p:sp>
+        <p:nvSpPr>
+          <p:cNvPr id="7" name="Shape 5"/>
+          <p:cNvSpPr/>
+          <p:nvPr/>
+        </p:nvSpPr>
+        <p:spPr>
+          <a:xfrm>
+            <a:off x="4754880" y="960120"/>
+            <a:ext cx="3931920" cy="3566160"/>
           </a:xfrm>
           <a:prstGeom prst="rect">
             <a:avLst>
-              <a:gd name="adj" fmla="val 9091"/>
+              <a:gd name="adj" fmla="val 1282"/>
             </a:avLst>
           </a:prstGeom>
           <a:solidFill>
-            <a:srgbClr val="F9F6F1"/>
+            <a:srgbClr val="FDE8E8"/>
           </a:solidFill>
           <a:ln/>
           <a:effectLst>
@@ -3145,21 +4457,37 @@
             </a:outerShdw>
           </a:effectLst>
         </p:spPr>
-        <p:txBody>
-          <a:bodyPr/>
-          <a:p/>
-        </p:txBody>
-      </p:sp>
-      <p:sp>
-        <p:nvSpPr>
-          <p:cNvPr id="6" name="Text 4"/>
-          <p:cNvSpPr/>
-          <p:nvPr/>
-        </p:nvSpPr>
-        <p:spPr>
-          <a:xfrm>
-            <a:off x="1554480" y="1709928"/>
-            <a:ext cx="6035040" cy="502920"/>
+      </p:sp>
+      <p:sp>
+        <p:nvSpPr>
+          <p:cNvPr id="8" name="Shape 6"/>
+          <p:cNvSpPr/>
+          <p:nvPr/>
+        </p:nvSpPr>
+        <p:spPr>
+          <a:xfrm>
+            <a:off x="4754880" y="960120"/>
+            <a:ext cx="54864" cy="3566160"/>
+          </a:xfrm>
+          <a:prstGeom prst="rect">
+            <a:avLst/>
+          </a:prstGeom>
+          <a:solidFill>
+            <a:srgbClr val="D9534F"/>
+          </a:solidFill>
+          <a:ln/>
+        </p:spPr>
+      </p:sp>
+      <p:sp>
+        <p:nvSpPr>
+          <p:cNvPr id="9" name="Text 7"/>
+          <p:cNvSpPr/>
+          <p:nvPr/>
+        </p:nvSpPr>
+        <p:spPr>
+          <a:xfrm>
+            <a:off x="4937760" y="1069848"/>
+            <a:ext cx="3611880" cy="365760"/>
           </a:xfrm>
           <a:prstGeom prst="rect">
             <a:avLst/>
@@ -3168,14 +4496,57 @@
           <a:ln/>
         </p:spPr>
         <p:txBody>
-          <a:bodyPr wrap="square" rtlCol="0" anchor="ctr"/>
+          <a:bodyPr wrap="square" lIns="0" tIns="0" rIns="0" bIns="0" rtlCol="0" anchor="t"/>
           <a:lstStyle/>
           <a:p>
             <a:pPr indent="0" marL="0">
               <a:buNone/>
             </a:pPr>
             <a:r>
-              <a:rPr lang="en-US" sz="1500" dirty="0">
+              <a:rPr lang="en-US" sz="1800" b="1" dirty="0">
+                <a:solidFill>
+                  <a:srgbClr val="922B21"/>
+                </a:solidFill>
+                <a:latin typeface="Arial" pitchFamily="34" charset="0"/>
+                <a:ea typeface="Arial" pitchFamily="34" charset="-122"/>
+                <a:cs typeface="Arial" pitchFamily="34" charset="-120"/>
+              </a:rPr>
+              <a:t>GEEN collectief</a:t>
+            </a:r>
+            <a:endParaRPr lang="en-US" sz="1800" dirty="0"/>
+          </a:p>
+        </p:txBody>
+      </p:sp>
+      <p:sp>
+        <p:nvSpPr>
+          <p:cNvPr id="10" name="Text 8"/>
+          <p:cNvSpPr/>
+          <p:nvPr/>
+        </p:nvSpPr>
+        <p:spPr>
+          <a:xfrm>
+            <a:off x="4937760" y="1463040"/>
+            <a:ext cx="3611880" cy="2926080"/>
+          </a:xfrm>
+          <a:prstGeom prst="rect">
+            <a:avLst/>
+          </a:prstGeom>
+          <a:noFill/>
+          <a:ln/>
+        </p:spPr>
+        <p:txBody>
+          <a:bodyPr wrap="square" lIns="0" tIns="0" rIns="0" bIns="0" rtlCol="0" anchor="t"/>
+          <a:lstStyle/>
+          <a:p>
+            <a:pPr algn="l" marL="342900" indent="-342900">
+              <a:lnSpc>
+                <a:spcPct val="120000"/>
+              </a:lnSpc>
+              <a:buSzPct val="100000"/>
+              <a:buChar char="■"/>
+            </a:pPr>
+            <a:r>
+              <a:rPr lang="en-US" sz="1300" b="1" dirty="0">
                 <a:solidFill>
                   <a:srgbClr val="2D3748"/>
                 </a:solidFill>
@@ -3183,71 +4554,40 @@
                 <a:ea typeface="Arial" pitchFamily="34" charset="-122"/>
                 <a:cs typeface="Arial" pitchFamily="34" charset="-120"/>
               </a:rPr>
-              <a:t>↓  Consumenten betalen niet vrijwillig</a:t>
-            </a:r>
-            <a:endParaRPr lang="en-US" sz="1500" dirty="0"/>
-          </a:p>
-        </p:txBody>
-      </p:sp>
-      <p:sp>
-        <p:nvSpPr>
-          <p:cNvPr id="7" name="Shape 5"/>
-          <p:cNvSpPr/>
-          <p:nvPr/>
-        </p:nvSpPr>
-        <p:spPr>
-          <a:xfrm>
-            <a:off x="1371600" y="2322576"/>
-            <a:ext cx="6400800" cy="502920"/>
-          </a:xfrm>
-          <a:prstGeom prst="rect">
-            <a:avLst>
-              <a:gd name="adj" fmla="val 9091"/>
-            </a:avLst>
-          </a:prstGeom>
-          <a:solidFill>
-            <a:srgbClr val="F9F6F1"/>
-          </a:solidFill>
-          <a:ln/>
-          <a:effectLst>
-            <a:outerShdw sx="100000" sy="100000" kx="0" ky="0" algn="bl" rotWithShape="0" blurRad="76200" dist="25400" dir="8100000">
-              <a:srgbClr val="000000">
-                <a:alpha val="10000"/>
-              </a:srgbClr>
-            </a:outerShdw>
-          </a:effectLst>
-        </p:spPr>
-        <p:txBody>
-          <a:bodyPr/>
-          <a:p/>
-        </p:txBody>
-      </p:sp>
-      <p:sp>
-        <p:nvSpPr>
-          <p:cNvPr id="8" name="Text 6"/>
-          <p:cNvSpPr/>
-          <p:nvPr/>
-        </p:nvSpPr>
-        <p:spPr>
-          <a:xfrm>
-            <a:off x="1554480" y="2322576"/>
-            <a:ext cx="6035040" cy="502920"/>
-          </a:xfrm>
-          <a:prstGeom prst="rect">
-            <a:avLst/>
-          </a:prstGeom>
-          <a:noFill/>
-          <a:ln/>
-        </p:spPr>
-        <p:txBody>
-          <a:bodyPr wrap="square" rtlCol="0" anchor="ctr"/>
-          <a:lstStyle/>
-          <a:p>
-            <a:pPr indent="0" marL="0">
+              <a:t>Beveiligingsdienst</a:t>
+            </a:r>
+            <a:endParaRPr lang="en-US" sz="1300" dirty="0"/>
+          </a:p>
+          <a:p>
+            <a:pPr algn="l" indent="0" marL="0">
+              <a:lnSpc>
+                <a:spcPct val="120000"/>
+              </a:lnSpc>
               <a:buNone/>
             </a:pPr>
             <a:r>
-              <a:rPr lang="en-US" sz="1500" dirty="0">
+              <a:rPr lang="en-US" sz="1100" i="1" dirty="0">
+                <a:solidFill>
+                  <a:srgbClr val="718096"/>
+                </a:solidFill>
+                <a:latin typeface="Arial" pitchFamily="34" charset="0"/>
+                <a:ea typeface="Arial" pitchFamily="34" charset="-122"/>
+                <a:cs typeface="Arial" pitchFamily="34" charset="-120"/>
+              </a:rPr>
+              <a:t>   uitsluitbaar: alleen klanten</a:t>
+            </a:r>
+            <a:endParaRPr lang="en-US" sz="1300" dirty="0"/>
+          </a:p>
+          <a:p>
+            <a:pPr algn="l" marL="342900" indent="-342900">
+              <a:lnSpc>
+                <a:spcPct val="120000"/>
+              </a:lnSpc>
+              <a:buSzPct val="100000"/>
+              <a:buChar char="■"/>
+            </a:pPr>
+            <a:r>
+              <a:rPr lang="en-US" sz="1300" b="1" dirty="0">
                 <a:solidFill>
                   <a:srgbClr val="2D3748"/>
                 </a:solidFill>
@@ -3255,167 +4595,81 @@
                 <a:ea typeface="Arial" pitchFamily="34" charset="-122"/>
                 <a:cs typeface="Arial" pitchFamily="34" charset="-120"/>
               </a:rPr>
-              <a:t>↓  Particuliere aanbieder maakt geen winst</a:t>
-            </a:r>
-            <a:endParaRPr lang="en-US" sz="1500" dirty="0"/>
-          </a:p>
-        </p:txBody>
-      </p:sp>
-      <p:sp>
-        <p:nvSpPr>
-          <p:cNvPr id="9" name="Shape 7"/>
-          <p:cNvSpPr/>
-          <p:nvPr/>
-        </p:nvSpPr>
-        <p:spPr>
-          <a:xfrm>
-            <a:off x="1371600" y="2935224"/>
-            <a:ext cx="6400800" cy="502920"/>
-          </a:xfrm>
-          <a:prstGeom prst="rect">
-            <a:avLst>
-              <a:gd name="adj" fmla="val 9091"/>
-            </a:avLst>
-          </a:prstGeom>
-          <a:solidFill>
-            <a:srgbClr val="1A5276"/>
-          </a:solidFill>
-          <a:ln/>
-          <a:effectLst>
-            <a:outerShdw sx="100000" sy="100000" kx="0" ky="0" algn="bl" rotWithShape="0" blurRad="76200" dist="25400" dir="8100000">
-              <a:srgbClr val="000000">
-                <a:alpha val="10000"/>
-              </a:srgbClr>
-            </a:outerShdw>
-          </a:effectLst>
-        </p:spPr>
-        <p:txBody>
-          <a:bodyPr/>
-          <a:p/>
-        </p:txBody>
-      </p:sp>
-      <p:sp>
-        <p:nvSpPr>
-          <p:cNvPr id="10" name="Text 8"/>
-          <p:cNvSpPr/>
-          <p:nvPr/>
-        </p:nvSpPr>
-        <p:spPr>
-          <a:xfrm>
-            <a:off x="1554480" y="2935224"/>
-            <a:ext cx="6035040" cy="502920"/>
-          </a:xfrm>
-          <a:prstGeom prst="rect">
-            <a:avLst/>
-          </a:prstGeom>
-          <a:noFill/>
-          <a:ln/>
-        </p:spPr>
-        <p:txBody>
-          <a:bodyPr wrap="square" rtlCol="0" anchor="ctr"/>
-          <a:lstStyle/>
-          <a:p>
-            <a:pPr indent="0" marL="0">
+              <a:t>Privéonderwijs</a:t>
+            </a:r>
+            <a:endParaRPr lang="en-US" sz="1300" dirty="0"/>
+          </a:p>
+          <a:p>
+            <a:pPr algn="l" indent="0" marL="0">
+              <a:lnSpc>
+                <a:spcPct val="120000"/>
+              </a:lnSpc>
               <a:buNone/>
             </a:pPr>
             <a:r>
-              <a:rPr lang="en-US" sz="1500" b="1" dirty="0">
-                <a:solidFill>
-                  <a:srgbClr val="FFFFFF"/>
-                </a:solidFill>
-                <a:latin typeface="Arial" pitchFamily="34" charset="0"/>
-                <a:ea typeface="Arial" pitchFamily="34" charset="-122"/>
-                <a:cs typeface="Arial" pitchFamily="34" charset="-120"/>
-              </a:rPr>
-              <a:t>↓  Markt levert het goed niet</a:t>
-            </a:r>
-            <a:endParaRPr lang="en-US" sz="1500" dirty="0"/>
-          </a:p>
-        </p:txBody>
-      </p:sp>
-      <p:sp>
-        <p:nvSpPr>
-          <p:cNvPr id="11" name="Shape 9"/>
-          <p:cNvSpPr/>
-          <p:nvPr/>
-        </p:nvSpPr>
-        <p:spPr>
-          <a:xfrm>
-            <a:off x="457200" y="3566160"/>
-            <a:ext cx="8229600" cy="731520"/>
-          </a:xfrm>
-          <a:prstGeom prst="rect">
-            <a:avLst>
-              <a:gd name="adj" fmla="val 6250"/>
-            </a:avLst>
-          </a:prstGeom>
-          <a:solidFill>
-            <a:srgbClr val="F9F6F1"/>
-          </a:solidFill>
-          <a:ln/>
-          <a:effectLst>
-            <a:outerShdw sx="100000" sy="100000" kx="0" ky="0" algn="bl" rotWithShape="0" blurRad="76200" dist="25400" dir="8100000">
-              <a:srgbClr val="000000">
-                <a:alpha val="10000"/>
-              </a:srgbClr>
-            </a:outerShdw>
-          </a:effectLst>
-        </p:spPr>
-        <p:txBody>
-          <a:bodyPr/>
-          <a:p/>
-        </p:txBody>
-      </p:sp>
-      <p:sp>
-        <p:nvSpPr>
-          <p:cNvPr id="12" name="Shape 10"/>
-          <p:cNvSpPr/>
-          <p:nvPr/>
-        </p:nvSpPr>
-        <p:spPr>
-          <a:xfrm>
-            <a:off x="457200" y="3566160"/>
-            <a:ext cx="54864" cy="731520"/>
-          </a:xfrm>
-          <a:prstGeom prst="rect">
-            <a:avLst/>
-          </a:prstGeom>
-          <a:solidFill>
-            <a:srgbClr val="1A5276"/>
-          </a:solidFill>
-          <a:ln/>
-        </p:spPr>
-        <p:txBody>
-          <a:bodyPr/>
-          <a:p/>
-        </p:txBody>
-      </p:sp>
-      <p:sp>
-        <p:nvSpPr>
-          <p:cNvPr id="13" name="Text 11"/>
-          <p:cNvSpPr/>
-          <p:nvPr/>
-        </p:nvSpPr>
-        <p:spPr>
-          <a:xfrm>
-            <a:off x="640080" y="3566160"/>
-            <a:ext cx="7863840" cy="731520"/>
-          </a:xfrm>
-          <a:prstGeom prst="rect">
-            <a:avLst/>
-          </a:prstGeom>
-          <a:noFill/>
-          <a:ln/>
-        </p:spPr>
-        <p:txBody>
-          <a:bodyPr wrap="square" rtlCol="0" anchor="ctr"/>
-          <a:lstStyle/>
-          <a:p>
-            <a:pPr indent="0" marL="0">
+              <a:rPr lang="en-US" sz="1100" i="1" dirty="0">
+                <a:solidFill>
+                  <a:srgbClr val="718096"/>
+                </a:solidFill>
+                <a:latin typeface="Arial" pitchFamily="34" charset="0"/>
+                <a:ea typeface="Arial" pitchFamily="34" charset="-122"/>
+                <a:cs typeface="Arial" pitchFamily="34" charset="-120"/>
+              </a:rPr>
+              <a:t>   uitsluitbaar: collegegeld</a:t>
+            </a:r>
+            <a:endParaRPr lang="en-US" sz="1300" dirty="0"/>
+          </a:p>
+          <a:p>
+            <a:pPr algn="l" marL="342900" indent="-342900">
+              <a:lnSpc>
+                <a:spcPct val="120000"/>
+              </a:lnSpc>
+              <a:buSzPct val="100000"/>
+              <a:buChar char="■"/>
+            </a:pPr>
+            <a:r>
+              <a:rPr lang="en-US" sz="1300" b="1" dirty="0">
+                <a:solidFill>
+                  <a:srgbClr val="2D3748"/>
+                </a:solidFill>
+                <a:latin typeface="Arial" pitchFamily="34" charset="0"/>
+                <a:ea typeface="Arial" pitchFamily="34" charset="-122"/>
+                <a:cs typeface="Arial" pitchFamily="34" charset="-120"/>
+              </a:rPr>
+              <a:t>Huisarts</a:t>
+            </a:r>
+            <a:endParaRPr lang="en-US" sz="1300" dirty="0"/>
+          </a:p>
+          <a:p>
+            <a:pPr algn="l" indent="0" marL="0">
+              <a:lnSpc>
+                <a:spcPct val="120000"/>
+              </a:lnSpc>
               <a:buNone/>
             </a:pPr>
             <a:r>
-              <a:rPr lang="en-US" sz="1400" dirty="0">
+              <a:rPr lang="en-US" sz="1100" i="1" dirty="0">
+                <a:solidFill>
+                  <a:srgbClr val="718096"/>
+                </a:solidFill>
+                <a:latin typeface="Arial" pitchFamily="34" charset="0"/>
+                <a:ea typeface="Arial" pitchFamily="34" charset="-122"/>
+                <a:cs typeface="Arial" pitchFamily="34" charset="-120"/>
+              </a:rPr>
+              <a:t>   rivaliserend: vol = vol</a:t>
+            </a:r>
+            <a:endParaRPr lang="en-US" sz="1300" dirty="0"/>
+          </a:p>
+          <a:p>
+            <a:pPr algn="l" marL="342900" indent="-342900">
+              <a:lnSpc>
+                <a:spcPct val="120000"/>
+              </a:lnSpc>
+              <a:buSzPct val="100000"/>
+              <a:buChar char="■"/>
+            </a:pPr>
+            <a:r>
+              <a:rPr lang="en-US" sz="1300" b="1" dirty="0">
                 <a:solidFill>
                   <a:srgbClr val="2D3748"/>
                 </a:solidFill>
@@ -3423,9 +4677,29 @@
                 <a:ea typeface="Arial" pitchFamily="34" charset="-122"/>
                 <a:cs typeface="Arial" pitchFamily="34" charset="-120"/>
               </a:rPr>
-              <a:t>Een particuliere aanbieder kan geen winst maken, omdat niemand bereid is te betalen voor iets waar je toch gratis van meeprofiteert.</a:t>
-            </a:r>
-            <a:endParaRPr lang="en-US" sz="1400" dirty="0"/>
+              <a:t>Netflix</a:t>
+            </a:r>
+            <a:endParaRPr lang="en-US" sz="1300" dirty="0"/>
+          </a:p>
+          <a:p>
+            <a:pPr algn="l" indent="0" marL="0">
+              <a:lnSpc>
+                <a:spcPct val="120000"/>
+              </a:lnSpc>
+              <a:buNone/>
+            </a:pPr>
+            <a:r>
+              <a:rPr lang="en-US" sz="1100" i="1" dirty="0">
+                <a:solidFill>
+                  <a:srgbClr val="718096"/>
+                </a:solidFill>
+                <a:latin typeface="Arial" pitchFamily="34" charset="0"/>
+                <a:ea typeface="Arial" pitchFamily="34" charset="-122"/>
+                <a:cs typeface="Arial" pitchFamily="34" charset="-120"/>
+              </a:rPr>
+              <a:t>   uitsluitbaar: betaalmuur</a:t>
+            </a:r>
+            <a:endParaRPr lang="en-US" sz="1300" dirty="0"/>
           </a:p>
         </p:txBody>
       </p:sp>
@@ -3487,372 +4761,36 @@
                 <a:ea typeface="Arial" pitchFamily="34" charset="-122"/>
                 <a:cs typeface="Arial" pitchFamily="34" charset="-120"/>
               </a:rPr>
-              <a:t>Het meeliftgedrag</a:t>
+              <a:t>Beslisboom: is het een collectief goed?</a:t>
             </a:r>
             <a:endParaRPr lang="en-US" sz="2400" dirty="0"/>
           </a:p>
         </p:txBody>
       </p:sp>
-      <p:sp>
-        <p:nvSpPr>
-          <p:cNvPr id="3" name="Shape 1"/>
-          <p:cNvSpPr/>
-          <p:nvPr/>
-        </p:nvSpPr>
-        <p:spPr>
-          <a:xfrm>
-            <a:off x="1371600" y="1005840"/>
-            <a:ext cx="6400800" cy="502920"/>
-          </a:xfrm>
-          <a:prstGeom prst="rect">
-            <a:avLst>
-              <a:gd name="adj" fmla="val 9091"/>
-            </a:avLst>
-          </a:prstGeom>
-          <a:solidFill>
-            <a:srgbClr val="F9F6F1"/>
-          </a:solidFill>
-          <a:ln/>
-          <a:effectLst>
-            <a:outerShdw sx="100000" sy="100000" kx="0" ky="0" algn="bl" rotWithShape="0" blurRad="76200" dist="25400" dir="8100000">
-              <a:srgbClr val="000000">
-                <a:alpha val="10000"/>
-              </a:srgbClr>
-            </a:outerShdw>
-          </a:effectLst>
-        </p:spPr>
-        <p:txBody>
-          <a:bodyPr/>
-          <a:p/>
-        </p:txBody>
-      </p:sp>
-      <p:sp>
-        <p:nvSpPr>
-          <p:cNvPr id="4" name="Text 2"/>
-          <p:cNvSpPr/>
-          <p:nvPr/>
-        </p:nvSpPr>
-        <p:spPr>
-          <a:xfrm>
-            <a:off x="1554480" y="1005840"/>
-            <a:ext cx="6035040" cy="502920"/>
-          </a:xfrm>
-          <a:prstGeom prst="rect">
-            <a:avLst/>
-          </a:prstGeom>
-          <a:noFill/>
-          <a:ln/>
-        </p:spPr>
-        <p:txBody>
-          <a:bodyPr wrap="square" rtlCol="0" anchor="ctr"/>
-          <a:lstStyle/>
-          <a:p>
-            <a:pPr indent="0" marL="0">
-              <a:buNone/>
-            </a:pPr>
-            <a:r>
-              <a:rPr lang="en-US" sz="1500" dirty="0">
-                <a:solidFill>
-                  <a:srgbClr val="2D3748"/>
-                </a:solidFill>
-                <a:latin typeface="Arial" pitchFamily="34" charset="0"/>
-                <a:ea typeface="Arial" pitchFamily="34" charset="-122"/>
-                <a:cs typeface="Arial" pitchFamily="34" charset="-120"/>
-              </a:rPr>
-              <a:t>Een collectief goed is beschikbaar voor iedereen</a:t>
-            </a:r>
-            <a:endParaRPr lang="en-US" sz="1500" dirty="0"/>
-          </a:p>
-        </p:txBody>
-      </p:sp>
-      <p:sp>
-        <p:nvSpPr>
-          <p:cNvPr id="5" name="Shape 3"/>
-          <p:cNvSpPr/>
-          <p:nvPr/>
-        </p:nvSpPr>
-        <p:spPr>
-          <a:xfrm>
-            <a:off x="1371600" y="1618488"/>
-            <a:ext cx="6400800" cy="502920"/>
-          </a:xfrm>
-          <a:prstGeom prst="rect">
-            <a:avLst>
-              <a:gd name="adj" fmla="val 9091"/>
-            </a:avLst>
-          </a:prstGeom>
-          <a:solidFill>
-            <a:srgbClr val="F9F6F1"/>
-          </a:solidFill>
-          <a:ln/>
-          <a:effectLst>
-            <a:outerShdw sx="100000" sy="100000" kx="0" ky="0" algn="bl" rotWithShape="0" blurRad="76200" dist="25400" dir="8100000">
-              <a:srgbClr val="000000">
-                <a:alpha val="10000"/>
-              </a:srgbClr>
-            </a:outerShdw>
-          </a:effectLst>
-        </p:spPr>
-        <p:txBody>
-          <a:bodyPr/>
-          <a:p/>
-        </p:txBody>
-      </p:sp>
-      <p:sp>
-        <p:nvSpPr>
-          <p:cNvPr id="6" name="Text 4"/>
-          <p:cNvSpPr/>
-          <p:nvPr/>
-        </p:nvSpPr>
-        <p:spPr>
-          <a:xfrm>
-            <a:off x="1554480" y="1618488"/>
-            <a:ext cx="6035040" cy="502920"/>
-          </a:xfrm>
-          <a:prstGeom prst="rect">
-            <a:avLst/>
-          </a:prstGeom>
-          <a:noFill/>
-          <a:ln/>
-        </p:spPr>
-        <p:txBody>
-          <a:bodyPr wrap="square" rtlCol="0" anchor="ctr"/>
-          <a:lstStyle/>
-          <a:p>
-            <a:pPr indent="0" marL="0">
-              <a:buNone/>
-            </a:pPr>
-            <a:r>
-              <a:rPr lang="en-US" sz="1500" dirty="0">
-                <a:solidFill>
-                  <a:srgbClr val="2D3748"/>
-                </a:solidFill>
-                <a:latin typeface="Arial" pitchFamily="34" charset="0"/>
-                <a:ea typeface="Arial" pitchFamily="34" charset="-122"/>
-                <a:cs typeface="Arial" pitchFamily="34" charset="-120"/>
-              </a:rPr>
-              <a:t>↓  Anderen profiteren gratis mee (niet-uitsluitbaar)</a:t>
-            </a:r>
-            <a:endParaRPr lang="en-US" sz="1500" dirty="0"/>
-          </a:p>
-        </p:txBody>
-      </p:sp>
-      <p:sp>
-        <p:nvSpPr>
-          <p:cNvPr id="7" name="Shape 5"/>
-          <p:cNvSpPr/>
-          <p:nvPr/>
-        </p:nvSpPr>
-        <p:spPr>
-          <a:xfrm>
-            <a:off x="1371600" y="2231136"/>
-            <a:ext cx="6400800" cy="502920"/>
-          </a:xfrm>
-          <a:prstGeom prst="rect">
-            <a:avLst>
-              <a:gd name="adj" fmla="val 9091"/>
-            </a:avLst>
-          </a:prstGeom>
-          <a:solidFill>
-            <a:srgbClr val="F9F6F1"/>
-          </a:solidFill>
-          <a:ln/>
-          <a:effectLst>
-            <a:outerShdw sx="100000" sy="100000" kx="0" ky="0" algn="bl" rotWithShape="0" blurRad="76200" dist="25400" dir="8100000">
-              <a:srgbClr val="000000">
-                <a:alpha val="10000"/>
-              </a:srgbClr>
-            </a:outerShdw>
-          </a:effectLst>
-        </p:spPr>
-        <p:txBody>
-          <a:bodyPr/>
-          <a:p/>
-        </p:txBody>
-      </p:sp>
-      <p:sp>
-        <p:nvSpPr>
-          <p:cNvPr id="8" name="Text 6"/>
-          <p:cNvSpPr/>
-          <p:nvPr/>
-        </p:nvSpPr>
-        <p:spPr>
-          <a:xfrm>
-            <a:off x="1554480" y="2231136"/>
-            <a:ext cx="6035040" cy="502920"/>
-          </a:xfrm>
-          <a:prstGeom prst="rect">
-            <a:avLst/>
-          </a:prstGeom>
-          <a:noFill/>
-          <a:ln/>
-        </p:spPr>
-        <p:txBody>
-          <a:bodyPr wrap="square" rtlCol="0" anchor="ctr"/>
-          <a:lstStyle/>
-          <a:p>
-            <a:pPr indent="0" marL="0">
-              <a:buNone/>
-            </a:pPr>
-            <a:r>
-              <a:rPr lang="en-US" sz="1500" dirty="0">
-                <a:solidFill>
-                  <a:srgbClr val="2D3748"/>
-                </a:solidFill>
-                <a:latin typeface="Arial" pitchFamily="34" charset="0"/>
-                <a:ea typeface="Arial" pitchFamily="34" charset="-122"/>
-                <a:cs typeface="Arial" pitchFamily="34" charset="-120"/>
-              </a:rPr>
-              <a:t>↓  Niemand wil als enige betalen</a:t>
-            </a:r>
-            <a:endParaRPr lang="en-US" sz="1500" dirty="0"/>
-          </a:p>
-        </p:txBody>
-      </p:sp>
-      <p:sp>
-        <p:nvSpPr>
-          <p:cNvPr id="9" name="Shape 7"/>
-          <p:cNvSpPr/>
-          <p:nvPr/>
-        </p:nvSpPr>
-        <p:spPr>
-          <a:xfrm>
-            <a:off x="1371600" y="2843784"/>
-            <a:ext cx="6400800" cy="502920"/>
-          </a:xfrm>
-          <a:prstGeom prst="rect">
-            <a:avLst>
-              <a:gd name="adj" fmla="val 9091"/>
-            </a:avLst>
-          </a:prstGeom>
-          <a:solidFill>
-            <a:srgbClr val="F9F6F1"/>
-          </a:solidFill>
-          <a:ln/>
-          <a:effectLst>
-            <a:outerShdw sx="100000" sy="100000" kx="0" ky="0" algn="bl" rotWithShape="0" blurRad="76200" dist="25400" dir="8100000">
-              <a:srgbClr val="000000">
-                <a:alpha val="10000"/>
-              </a:srgbClr>
-            </a:outerShdw>
-          </a:effectLst>
-        </p:spPr>
-        <p:txBody>
-          <a:bodyPr/>
-          <a:p/>
-        </p:txBody>
-      </p:sp>
-      <p:sp>
-        <p:nvSpPr>
-          <p:cNvPr id="10" name="Text 8"/>
-          <p:cNvSpPr/>
-          <p:nvPr/>
-        </p:nvSpPr>
-        <p:spPr>
-          <a:xfrm>
-            <a:off x="1554480" y="2843784"/>
-            <a:ext cx="6035040" cy="502920"/>
-          </a:xfrm>
-          <a:prstGeom prst="rect">
-            <a:avLst/>
-          </a:prstGeom>
-          <a:noFill/>
-          <a:ln/>
-        </p:spPr>
-        <p:txBody>
-          <a:bodyPr wrap="square" rtlCol="0" anchor="ctr"/>
-          <a:lstStyle/>
-          <a:p>
-            <a:pPr indent="0" marL="0">
-              <a:buNone/>
-            </a:pPr>
-            <a:r>
-              <a:rPr lang="en-US" sz="1500" dirty="0">
-                <a:solidFill>
-                  <a:srgbClr val="2D3748"/>
-                </a:solidFill>
-                <a:latin typeface="Arial" pitchFamily="34" charset="0"/>
-                <a:ea typeface="Arial" pitchFamily="34" charset="-122"/>
-                <a:cs typeface="Arial" pitchFamily="34" charset="-120"/>
-              </a:rPr>
-              <a:t>↓  Betalingsbereidheid is veel lager dan de waarde</a:t>
-            </a:r>
-            <a:endParaRPr lang="en-US" sz="1500" dirty="0"/>
-          </a:p>
-        </p:txBody>
-      </p:sp>
-      <p:sp>
-        <p:nvSpPr>
-          <p:cNvPr id="11" name="Shape 9"/>
-          <p:cNvSpPr/>
-          <p:nvPr/>
-        </p:nvSpPr>
-        <p:spPr>
-          <a:xfrm>
-            <a:off x="1371600" y="3456432"/>
-            <a:ext cx="6400800" cy="502920"/>
-          </a:xfrm>
-          <a:prstGeom prst="rect">
-            <a:avLst>
-              <a:gd name="adj" fmla="val 9091"/>
-            </a:avLst>
-          </a:prstGeom>
-          <a:solidFill>
-            <a:srgbClr val="E67E22"/>
-          </a:solidFill>
-          <a:ln/>
-          <a:effectLst>
-            <a:outerShdw sx="100000" sy="100000" kx="0" ky="0" algn="bl" rotWithShape="0" blurRad="76200" dist="25400" dir="8100000">
-              <a:srgbClr val="000000">
-                <a:alpha val="10000"/>
-              </a:srgbClr>
-            </a:outerShdw>
-          </a:effectLst>
-        </p:spPr>
-        <p:txBody>
-          <a:bodyPr/>
-          <a:p/>
-        </p:txBody>
-      </p:sp>
-      <p:sp>
-        <p:nvSpPr>
-          <p:cNvPr id="12" name="Text 10"/>
-          <p:cNvSpPr/>
-          <p:nvPr/>
-        </p:nvSpPr>
-        <p:spPr>
-          <a:xfrm>
-            <a:off x="1554480" y="3456432"/>
-            <a:ext cx="6035040" cy="502920"/>
-          </a:xfrm>
-          <a:prstGeom prst="rect">
-            <a:avLst/>
-          </a:prstGeom>
-          <a:noFill/>
-          <a:ln/>
-        </p:spPr>
-        <p:txBody>
-          <a:bodyPr wrap="square" rtlCol="0" anchor="ctr"/>
-          <a:lstStyle/>
-          <a:p>
-            <a:pPr indent="0" marL="0">
-              <a:buNone/>
-            </a:pPr>
-            <a:r>
-              <a:rPr lang="en-US" sz="1500" b="1" dirty="0">
-                <a:solidFill>
-                  <a:srgbClr val="FFFFFF"/>
-                </a:solidFill>
-                <a:latin typeface="Arial" pitchFamily="34" charset="0"/>
-                <a:ea typeface="Arial" pitchFamily="34" charset="-122"/>
-                <a:cs typeface="Arial" pitchFamily="34" charset="-120"/>
-              </a:rPr>
-              <a:t>↓  Dit heet: meeliftgedrag (free-rider gedrag)</a:t>
-            </a:r>
-            <a:endParaRPr lang="en-US" sz="1500" dirty="0"/>
-          </a:p>
-        </p:txBody>
-      </p:sp>
+      <p:pic>
+        <p:nvPicPr>
+          <p:cNvPr id="3" name="Image 0" descr="preencoded.png">    </p:cNvPr>
+          <p:cNvPicPr>
+            <a:picLocks noChangeAspect="1"/>
+          </p:cNvPicPr>
+          <p:nvPr/>
+        </p:nvPicPr>
+        <p:blipFill>
+          <a:blip r:embed="rId1"/>
+          <a:stretch>
+            <a:fillRect/>
+          </a:stretch>
+        </p:blipFill>
+        <p:spPr>
+          <a:xfrm>
+            <a:off x="685800" y="868680"/>
+            <a:ext cx="7772400" cy="3886200"/>
+          </a:xfrm>
+          <a:prstGeom prst="rect">
+            <a:avLst/>
+          </a:prstGeom>
+        </p:spPr>
+      </p:pic>
     </p:spTree>
   </p:cSld>
   <p:clrMapOvr>
@@ -3911,7 +4849,7 @@
                 <a:ea typeface="Arial" pitchFamily="34" charset="-122"/>
                 <a:cs typeface="Arial" pitchFamily="34" charset="-120"/>
               </a:rPr>
-              <a:t>De overheid als oplossing</a:t>
+              <a:t>Meeliftgedrag (free-rider probleem)</a:t>
             </a:r>
             <a:endParaRPr lang="en-US" sz="2400" dirty="0"/>
           </a:p>
@@ -3925,12 +4863,12 @@
         </p:nvSpPr>
         <p:spPr>
           <a:xfrm>
-            <a:off x="1371600" y="1097280"/>
-            <a:ext cx="6400800" cy="502920"/>
+            <a:off x="1188720" y="1005840"/>
+            <a:ext cx="6766560" cy="548640"/>
           </a:xfrm>
           <a:prstGeom prst="rect">
             <a:avLst>
-              <a:gd name="adj" fmla="val 9091"/>
+              <a:gd name="adj" fmla="val 6667"/>
             </a:avLst>
           </a:prstGeom>
           <a:solidFill>
@@ -3945,10 +4883,6 @@
             </a:outerShdw>
           </a:effectLst>
         </p:spPr>
-        <p:txBody>
-          <a:bodyPr/>
-          <a:p/>
-        </p:txBody>
       </p:sp>
       <p:sp>
         <p:nvSpPr>
@@ -3958,8 +4892,8 @@
         </p:nvSpPr>
         <p:spPr>
           <a:xfrm>
-            <a:off x="1554480" y="1097280"/>
-            <a:ext cx="6035040" cy="502920"/>
+            <a:off x="1371600" y="1005840"/>
+            <a:ext cx="6492240" cy="548640"/>
           </a:xfrm>
           <a:prstGeom prst="rect">
             <a:avLst/>
@@ -3968,14 +4902,14 @@
           <a:ln/>
         </p:spPr>
         <p:txBody>
-          <a:bodyPr wrap="square" rtlCol="0" anchor="ctr"/>
+          <a:bodyPr wrap="square" lIns="0" tIns="0" rIns="0" bIns="0" rtlCol="0" anchor="ctr"/>
           <a:lstStyle/>
           <a:p>
             <a:pPr indent="0" marL="0">
               <a:buNone/>
             </a:pPr>
             <a:r>
-              <a:rPr lang="en-US" sz="1500" dirty="0">
+              <a:rPr lang="en-US" sz="1400" dirty="0">
                 <a:solidFill>
                   <a:srgbClr val="2D3748"/>
                 </a:solidFill>
@@ -3983,9 +4917,9 @@
                 <a:ea typeface="Arial" pitchFamily="34" charset="-122"/>
                 <a:cs typeface="Arial" pitchFamily="34" charset="-120"/>
               </a:rPr>
-              <a:t>Markt faalt: geen aanbieder</a:t>
-            </a:r>
-            <a:endParaRPr lang="en-US" sz="1500" dirty="0"/>
+              <a:t>Een collectief goed is beschikbaar voor iedereen</a:t>
+            </a:r>
+            <a:endParaRPr lang="en-US" sz="1400" dirty="0"/>
           </a:p>
         </p:txBody>
       </p:sp>
@@ -3997,12 +4931,12 @@
         </p:nvSpPr>
         <p:spPr>
           <a:xfrm>
-            <a:off x="1371600" y="1709928"/>
-            <a:ext cx="6400800" cy="502920"/>
+            <a:off x="1188720" y="1664208"/>
+            <a:ext cx="6766560" cy="548640"/>
           </a:xfrm>
           <a:prstGeom prst="rect">
             <a:avLst>
-              <a:gd name="adj" fmla="val 9091"/>
+              <a:gd name="adj" fmla="val 6667"/>
             </a:avLst>
           </a:prstGeom>
           <a:solidFill>
@@ -4017,10 +4951,6 @@
             </a:outerShdw>
           </a:effectLst>
         </p:spPr>
-        <p:txBody>
-          <a:bodyPr/>
-          <a:p/>
-        </p:txBody>
       </p:sp>
       <p:sp>
         <p:nvSpPr>
@@ -4030,8 +4960,8 @@
         </p:nvSpPr>
         <p:spPr>
           <a:xfrm>
-            <a:off x="1554480" y="1709928"/>
-            <a:ext cx="6035040" cy="502920"/>
+            <a:off x="1371600" y="1664208"/>
+            <a:ext cx="6492240" cy="548640"/>
           </a:xfrm>
           <a:prstGeom prst="rect">
             <a:avLst/>
@@ -4040,14 +4970,14 @@
           <a:ln/>
         </p:spPr>
         <p:txBody>
-          <a:bodyPr wrap="square" rtlCol="0" anchor="ctr"/>
+          <a:bodyPr wrap="square" lIns="0" tIns="0" rIns="0" bIns="0" rtlCol="0" anchor="ctr"/>
           <a:lstStyle/>
           <a:p>
             <a:pPr indent="0" marL="0">
               <a:buNone/>
             </a:pPr>
             <a:r>
-              <a:rPr lang="en-US" sz="1500" dirty="0">
+              <a:rPr lang="en-US" sz="1400" dirty="0">
                 <a:solidFill>
                   <a:srgbClr val="2D3748"/>
                 </a:solidFill>
@@ -4055,9 +4985,9 @@
                 <a:ea typeface="Arial" pitchFamily="34" charset="-122"/>
                 <a:cs typeface="Arial" pitchFamily="34" charset="-120"/>
               </a:rPr>
-              <a:t>↓  Overheid biedt collectief goed aan</a:t>
-            </a:r>
-            <a:endParaRPr lang="en-US" sz="1500" dirty="0"/>
+              <a:t>↓  Niet-uitsluitbaar: je kunt niet-betalers niet tegenhouden</a:t>
+            </a:r>
+            <a:endParaRPr lang="en-US" sz="1400" dirty="0"/>
           </a:p>
         </p:txBody>
       </p:sp>
@@ -4069,16 +4999,16 @@
         </p:nvSpPr>
         <p:spPr>
           <a:xfrm>
-            <a:off x="1371600" y="2322576"/>
-            <a:ext cx="6400800" cy="502920"/>
+            <a:off x="1188720" y="2322576"/>
+            <a:ext cx="6766560" cy="548640"/>
           </a:xfrm>
           <a:prstGeom prst="rect">
             <a:avLst>
-              <a:gd name="adj" fmla="val 9091"/>
+              <a:gd name="adj" fmla="val 6667"/>
             </a:avLst>
           </a:prstGeom>
           <a:solidFill>
-            <a:srgbClr val="F9F6F1"/>
+            <a:srgbClr val="D9534F"/>
           </a:solidFill>
           <a:ln/>
           <a:effectLst>
@@ -4089,10 +5019,6 @@
             </a:outerShdw>
           </a:effectLst>
         </p:spPr>
-        <p:txBody>
-          <a:bodyPr/>
-          <a:p/>
-        </p:txBody>
       </p:sp>
       <p:sp>
         <p:nvSpPr>
@@ -4102,8 +5028,8 @@
         </p:nvSpPr>
         <p:spPr>
           <a:xfrm>
-            <a:off x="1554480" y="2322576"/>
-            <a:ext cx="6035040" cy="502920"/>
+            <a:off x="1371600" y="2322576"/>
+            <a:ext cx="6492240" cy="548640"/>
           </a:xfrm>
           <a:prstGeom prst="rect">
             <a:avLst/>
@@ -4112,24 +5038,24 @@
           <a:ln/>
         </p:spPr>
         <p:txBody>
-          <a:bodyPr wrap="square" rtlCol="0" anchor="ctr"/>
+          <a:bodyPr wrap="square" lIns="0" tIns="0" rIns="0" bIns="0" rtlCol="0" anchor="ctr"/>
           <a:lstStyle/>
           <a:p>
             <a:pPr indent="0" marL="0">
               <a:buNone/>
             </a:pPr>
             <a:r>
-              <a:rPr lang="en-US" sz="1500" dirty="0">
-                <a:solidFill>
-                  <a:srgbClr val="2D3748"/>
-                </a:solidFill>
-                <a:latin typeface="Arial" pitchFamily="34" charset="0"/>
-                <a:ea typeface="Arial" pitchFamily="34" charset="-122"/>
-                <a:cs typeface="Arial" pitchFamily="34" charset="-120"/>
-              </a:rPr>
-              <a:t>↓  Betaling via verplichte belasting</a:t>
-            </a:r>
-            <a:endParaRPr lang="en-US" sz="1500" dirty="0"/>
+              <a:rPr lang="en-US" sz="1400" b="1" dirty="0">
+                <a:solidFill>
+                  <a:srgbClr val="FFFFFF"/>
+                </a:solidFill>
+                <a:latin typeface="Arial" pitchFamily="34" charset="0"/>
+                <a:ea typeface="Arial" pitchFamily="34" charset="-122"/>
+                <a:cs typeface="Arial" pitchFamily="34" charset="-120"/>
+              </a:rPr>
+              <a:t>↓  Slim om NIET te betalen: je profiteert tóch</a:t>
+            </a:r>
+            <a:endParaRPr lang="en-US" sz="1400" dirty="0"/>
           </a:p>
         </p:txBody>
       </p:sp>
@@ -4141,16 +5067,16 @@
         </p:nvSpPr>
         <p:spPr>
           <a:xfrm>
-            <a:off x="1371600" y="2935224"/>
-            <a:ext cx="6400800" cy="502920"/>
+            <a:off x="1188720" y="2980944"/>
+            <a:ext cx="6766560" cy="548640"/>
           </a:xfrm>
           <a:prstGeom prst="rect">
             <a:avLst>
-              <a:gd name="adj" fmla="val 9091"/>
+              <a:gd name="adj" fmla="val 6667"/>
             </a:avLst>
           </a:prstGeom>
           <a:solidFill>
-            <a:srgbClr val="1E8449"/>
+            <a:srgbClr val="F9F6F1"/>
           </a:solidFill>
           <a:ln/>
           <a:effectLst>
@@ -4161,10 +5087,6 @@
             </a:outerShdw>
           </a:effectLst>
         </p:spPr>
-        <p:txBody>
-          <a:bodyPr/>
-          <a:p/>
-        </p:txBody>
       </p:sp>
       <p:sp>
         <p:nvSpPr>
@@ -4174,8 +5096,8 @@
         </p:nvSpPr>
         <p:spPr>
           <a:xfrm>
-            <a:off x="1554480" y="2935224"/>
-            <a:ext cx="6035040" cy="502920"/>
+            <a:off x="1371600" y="2980944"/>
+            <a:ext cx="6492240" cy="548640"/>
           </a:xfrm>
           <a:prstGeom prst="rect">
             <a:avLst/>
@@ -4184,24 +5106,24 @@
           <a:ln/>
         </p:spPr>
         <p:txBody>
-          <a:bodyPr wrap="square" rtlCol="0" anchor="ctr"/>
+          <a:bodyPr wrap="square" lIns="0" tIns="0" rIns="0" bIns="0" rtlCol="0" anchor="ctr"/>
           <a:lstStyle/>
           <a:p>
             <a:pPr indent="0" marL="0">
               <a:buNone/>
             </a:pPr>
             <a:r>
-              <a:rPr lang="en-US" sz="1500" b="1" dirty="0">
-                <a:solidFill>
-                  <a:srgbClr val="FFFFFF"/>
-                </a:solidFill>
-                <a:latin typeface="Arial" pitchFamily="34" charset="0"/>
-                <a:ea typeface="Arial" pitchFamily="34" charset="-122"/>
-                <a:cs typeface="Arial" pitchFamily="34" charset="-120"/>
-              </a:rPr>
-              <a:t>↓  Iedereen profiteert en betaalt mee</a:t>
-            </a:r>
-            <a:endParaRPr lang="en-US" sz="1500" dirty="0"/>
+              <a:rPr lang="en-US" sz="1400" dirty="0">
+                <a:solidFill>
+                  <a:srgbClr val="2D3748"/>
+                </a:solidFill>
+                <a:latin typeface="Arial" pitchFamily="34" charset="0"/>
+                <a:ea typeface="Arial" pitchFamily="34" charset="-122"/>
+                <a:cs typeface="Arial" pitchFamily="34" charset="-120"/>
+              </a:rPr>
+              <a:t>↓  Niemand wil als enige betalen</a:t>
+            </a:r>
+            <a:endParaRPr lang="en-US" sz="1400" dirty="0"/>
           </a:p>
         </p:txBody>
       </p:sp>
@@ -4213,16 +5135,16 @@
         </p:nvSpPr>
         <p:spPr>
           <a:xfrm>
-            <a:off x="457200" y="3566160"/>
-            <a:ext cx="8229600" cy="731520"/>
+            <a:off x="1188720" y="3639312"/>
+            <a:ext cx="6766560" cy="548640"/>
           </a:xfrm>
           <a:prstGeom prst="rect">
             <a:avLst>
-              <a:gd name="adj" fmla="val 6250"/>
+              <a:gd name="adj" fmla="val 6667"/>
             </a:avLst>
           </a:prstGeom>
           <a:solidFill>
-            <a:srgbClr val="E8F8F0"/>
+            <a:srgbClr val="D9534F"/>
           </a:solidFill>
           <a:ln/>
           <a:effectLst>
@@ -4233,45 +5155,17 @@
             </a:outerShdw>
           </a:effectLst>
         </p:spPr>
-        <p:txBody>
-          <a:bodyPr/>
-          <a:p/>
-        </p:txBody>
-      </p:sp>
-      <p:sp>
-        <p:nvSpPr>
-          <p:cNvPr id="12" name="Shape 10"/>
-          <p:cNvSpPr/>
-          <p:nvPr/>
-        </p:nvSpPr>
-        <p:spPr>
-          <a:xfrm>
-            <a:off x="457200" y="3566160"/>
-            <a:ext cx="54864" cy="731520"/>
-          </a:xfrm>
-          <a:prstGeom prst="rect">
-            <a:avLst/>
-          </a:prstGeom>
-          <a:solidFill>
-            <a:srgbClr val="1E8449"/>
-          </a:solidFill>
-          <a:ln/>
-        </p:spPr>
-        <p:txBody>
-          <a:bodyPr/>
-          <a:p/>
-        </p:txBody>
-      </p:sp>
-      <p:sp>
-        <p:nvSpPr>
-          <p:cNvPr id="13" name="Text 11"/>
-          <p:cNvSpPr/>
-          <p:nvPr/>
-        </p:nvSpPr>
-        <p:spPr>
-          <a:xfrm>
-            <a:off x="640080" y="3566160"/>
-            <a:ext cx="7863840" cy="731520"/>
+      </p:sp>
+      <p:sp>
+        <p:nvSpPr>
+          <p:cNvPr id="12" name="Text 10"/>
+          <p:cNvSpPr/>
+          <p:nvPr/>
+        </p:nvSpPr>
+        <p:spPr>
+          <a:xfrm>
+            <a:off x="1371600" y="3639312"/>
+            <a:ext cx="6492240" cy="548640"/>
           </a:xfrm>
           <a:prstGeom prst="rect">
             <a:avLst/>
@@ -4280,7 +5174,7 @@
           <a:ln/>
         </p:spPr>
         <p:txBody>
-          <a:bodyPr wrap="square" rtlCol="0" anchor="ctr"/>
+          <a:bodyPr wrap="square" lIns="0" tIns="0" rIns="0" bIns="0" rtlCol="0" anchor="ctr"/>
           <a:lstStyle/>
           <a:p>
             <a:pPr indent="0" marL="0">
@@ -4289,27 +5183,13 @@
             <a:r>
               <a:rPr lang="en-US" sz="1400" b="1" dirty="0">
                 <a:solidFill>
-                  <a:srgbClr val="1E8449"/>
-                </a:solidFill>
-                <a:latin typeface="Arial" pitchFamily="34" charset="0"/>
-                <a:ea typeface="Arial" pitchFamily="34" charset="-122"/>
-                <a:cs typeface="Arial" pitchFamily="34" charset="-120"/>
-              </a:rPr>
-              <a:t>Kernpunt: </a:t>
-            </a:r>
-            <a:pPr indent="0" marL="0">
-              <a:buNone/>
-            </a:pPr>
-            <a:r>
-              <a:rPr lang="en-US" sz="1400" dirty="0">
-                <a:solidFill>
-                  <a:srgbClr val="2D3748"/>
-                </a:solidFill>
-                <a:latin typeface="Arial" pitchFamily="34" charset="0"/>
-                <a:ea typeface="Arial" pitchFamily="34" charset="-122"/>
-                <a:cs typeface="Arial" pitchFamily="34" charset="-120"/>
-              </a:rPr>
-              <a:t>De overheid kan iedereen laten meebetalen via belastingheffing — dat kan een particuliere aanbieder niet.</a:t>
+                  <a:srgbClr val="FFFFFF"/>
+                </a:solidFill>
+                <a:latin typeface="Arial" pitchFamily="34" charset="0"/>
+                <a:ea typeface="Arial" pitchFamily="34" charset="-122"/>
+                <a:cs typeface="Arial" pitchFamily="34" charset="-120"/>
+              </a:rPr>
+              <a:t>↓  Betalingsbereidheid is veel lager dan de waarde</a:t>
             </a:r>
             <a:endParaRPr lang="en-US" sz="1400" dirty="0"/>
           </a:p>
@@ -4348,8 +5228,8 @@
         </p:nvSpPr>
         <p:spPr>
           <a:xfrm>
-            <a:off x="640080" y="457200"/>
-            <a:ext cx="7863840" cy="640080"/>
+            <a:off x="457200" y="0"/>
+            <a:ext cx="8229600" cy="685800"/>
           </a:xfrm>
           <a:prstGeom prst="rect">
             <a:avLst/>
@@ -4365,7 +5245,7 @@
               <a:buNone/>
             </a:pPr>
             <a:r>
-              <a:rPr lang="en-US" sz="2800" b="1" dirty="0">
+              <a:rPr lang="en-US" sz="2400" b="1" dirty="0">
                 <a:solidFill>
                   <a:srgbClr val="FFFFFF"/>
                 </a:solidFill>
@@ -4373,22 +5253,71 @@
                 <a:ea typeface="Arial" pitchFamily="34" charset="-122"/>
                 <a:cs typeface="Arial" pitchFamily="34" charset="-120"/>
               </a:rPr>
-              <a:t>Samenvatting</a:t>
-            </a:r>
-            <a:endParaRPr lang="en-US" sz="2800" dirty="0"/>
-          </a:p>
-        </p:txBody>
-      </p:sp>
-      <p:sp>
-        <p:nvSpPr>
-          <p:cNvPr id="3" name="Text 1"/>
-          <p:cNvSpPr/>
-          <p:nvPr/>
-        </p:nvSpPr>
-        <p:spPr>
-          <a:xfrm>
-            <a:off x="640080" y="1051560"/>
-            <a:ext cx="7863840" cy="365760"/>
+              <a:t>Meelifter: één betaalt, vier profiteren</a:t>
+            </a:r>
+            <a:endParaRPr lang="en-US" sz="2400" dirty="0"/>
+          </a:p>
+        </p:txBody>
+      </p:sp>
+      <p:pic>
+        <p:nvPicPr>
+          <p:cNvPr id="3" name="Image 0" descr="preencoded.png">    </p:cNvPr>
+          <p:cNvPicPr>
+            <a:picLocks noChangeAspect="1"/>
+          </p:cNvPicPr>
+          <p:nvPr/>
+        </p:nvPicPr>
+        <p:blipFill>
+          <a:blip r:embed="rId1"/>
+          <a:stretch>
+            <a:fillRect/>
+          </a:stretch>
+        </p:blipFill>
+        <p:spPr>
+          <a:xfrm>
+            <a:off x="685800" y="868680"/>
+            <a:ext cx="7772400" cy="3886200"/>
+          </a:xfrm>
+          <a:prstGeom prst="rect">
+            <a:avLst/>
+          </a:prstGeom>
+        </p:spPr>
+      </p:pic>
+    </p:spTree>
+  </p:cSld>
+  <p:clrMapOvr>
+    <a:masterClrMapping/>
+  </p:clrMapOvr>
+</p:sld>
+</file>
+
+<file path=ppt/slides/slide9.xml><?xml version="1.0" encoding="utf-8"?>
+<p:sld xmlns:a="http://schemas.openxmlformats.org/drawingml/2006/main" xmlns:r="http://schemas.openxmlformats.org/officeDocument/2006/relationships" xmlns:p="http://schemas.openxmlformats.org/presentationml/2006/main">
+  <p:cSld name="Slide 9">
+    <p:spTree>
+      <p:nvGrpSpPr>
+        <p:cNvPr id="1" name=""/>
+        <p:cNvGrpSpPr/>
+        <p:nvPr/>
+      </p:nvGrpSpPr>
+      <p:grpSpPr>
+        <a:xfrm>
+          <a:off x="0" y="0"/>
+          <a:ext cx="0" cy="0"/>
+          <a:chOff x="0" y="0"/>
+          <a:chExt cx="0" cy="0"/>
+        </a:xfrm>
+      </p:grpSpPr>
+      <p:sp>
+        <p:nvSpPr>
+          <p:cNvPr id="2" name="Text 0"/>
+          <p:cNvSpPr/>
+          <p:nvPr/>
+        </p:nvSpPr>
+        <p:spPr>
+          <a:xfrm>
+            <a:off x="457200" y="0"/>
+            <a:ext cx="8229600" cy="685800"/>
           </a:xfrm>
           <a:prstGeom prst="rect">
             <a:avLst/>
@@ -4404,15 +5333,83 @@
               <a:buNone/>
             </a:pPr>
             <a:r>
-              <a:rPr lang="en-US" sz="1400" i="1" dirty="0">
-                <a:solidFill>
-                  <a:srgbClr val="718096"/>
-                </a:solidFill>
-                <a:latin typeface="Arial" pitchFamily="34" charset="0"/>
-                <a:ea typeface="Arial" pitchFamily="34" charset="-122"/>
-                <a:cs typeface="Arial" pitchFamily="34" charset="-120"/>
-              </a:rPr>
-              <a:t>Beheers je dit voordat je gaat oefenen?</a:t>
+              <a:rPr lang="en-US" sz="2400" b="1" dirty="0">
+                <a:solidFill>
+                  <a:srgbClr val="FFFFFF"/>
+                </a:solidFill>
+                <a:latin typeface="Arial" pitchFamily="34" charset="0"/>
+                <a:ea typeface="Arial" pitchFamily="34" charset="-122"/>
+                <a:cs typeface="Arial" pitchFamily="34" charset="-120"/>
+              </a:rPr>
+              <a:t>Waarom faalt de markt?</a:t>
+            </a:r>
+            <a:endParaRPr lang="en-US" sz="2400" dirty="0"/>
+          </a:p>
+        </p:txBody>
+      </p:sp>
+      <p:sp>
+        <p:nvSpPr>
+          <p:cNvPr id="3" name="Shape 1"/>
+          <p:cNvSpPr/>
+          <p:nvPr/>
+        </p:nvSpPr>
+        <p:spPr>
+          <a:xfrm>
+            <a:off x="1188720" y="1005840"/>
+            <a:ext cx="6766560" cy="548640"/>
+          </a:xfrm>
+          <a:prstGeom prst="rect">
+            <a:avLst>
+              <a:gd name="adj" fmla="val 6667"/>
+            </a:avLst>
+          </a:prstGeom>
+          <a:solidFill>
+            <a:srgbClr val="F9F6F1"/>
+          </a:solidFill>
+          <a:ln/>
+          <a:effectLst>
+            <a:outerShdw sx="100000" sy="100000" kx="0" ky="0" algn="bl" rotWithShape="0" blurRad="76200" dist="25400" dir="8100000">
+              <a:srgbClr val="000000">
+                <a:alpha val="10000"/>
+              </a:srgbClr>
+            </a:outerShdw>
+          </a:effectLst>
+        </p:spPr>
+      </p:sp>
+      <p:sp>
+        <p:nvSpPr>
+          <p:cNvPr id="4" name="Text 2"/>
+          <p:cNvSpPr/>
+          <p:nvPr/>
+        </p:nvSpPr>
+        <p:spPr>
+          <a:xfrm>
+            <a:off x="1371600" y="1005840"/>
+            <a:ext cx="6492240" cy="548640"/>
+          </a:xfrm>
+          <a:prstGeom prst="rect">
+            <a:avLst/>
+          </a:prstGeom>
+          <a:noFill/>
+          <a:ln/>
+        </p:spPr>
+        <p:txBody>
+          <a:bodyPr wrap="square" lIns="0" tIns="0" rIns="0" bIns="0" rtlCol="0" anchor="ctr"/>
+          <a:lstStyle/>
+          <a:p>
+            <a:pPr indent="0" marL="0">
+              <a:buNone/>
+            </a:pPr>
+            <a:r>
+              <a:rPr lang="en-US" sz="1400" dirty="0">
+                <a:solidFill>
+                  <a:srgbClr val="2D3748"/>
+                </a:solidFill>
+                <a:latin typeface="Arial" pitchFamily="34" charset="0"/>
+                <a:ea typeface="Arial" pitchFamily="34" charset="-122"/>
+                <a:cs typeface="Arial" pitchFamily="34" charset="-120"/>
+              </a:rPr>
+              <a:t>Collectief goed is niet-uitsluitbaar</a:t>
             </a:r>
             <a:endParaRPr lang="en-US" sz="1400" dirty="0"/>
           </a:p>
@@ -4420,14 +5417,43 @@
       </p:sp>
       <p:sp>
         <p:nvSpPr>
-          <p:cNvPr id="4" name="Text 2"/>
-          <p:cNvSpPr/>
-          <p:nvPr/>
-        </p:nvSpPr>
-        <p:spPr>
-          <a:xfrm>
-            <a:off x="640080" y="1554480"/>
-            <a:ext cx="7863840" cy="2926080"/>
+          <p:cNvPr id="5" name="Shape 3"/>
+          <p:cNvSpPr/>
+          <p:nvPr/>
+        </p:nvSpPr>
+        <p:spPr>
+          <a:xfrm>
+            <a:off x="1188720" y="1664208"/>
+            <a:ext cx="6766560" cy="548640"/>
+          </a:xfrm>
+          <a:prstGeom prst="rect">
+            <a:avLst>
+              <a:gd name="adj" fmla="val 6667"/>
+            </a:avLst>
+          </a:prstGeom>
+          <a:solidFill>
+            <a:srgbClr val="F9F6F1"/>
+          </a:solidFill>
+          <a:ln/>
+          <a:effectLst>
+            <a:outerShdw sx="100000" sy="100000" kx="0" ky="0" algn="bl" rotWithShape="0" blurRad="76200" dist="25400" dir="8100000">
+              <a:srgbClr val="000000">
+                <a:alpha val="10000"/>
+              </a:srgbClr>
+            </a:outerShdw>
+          </a:effectLst>
+        </p:spPr>
+      </p:sp>
+      <p:sp>
+        <p:nvSpPr>
+          <p:cNvPr id="6" name="Text 4"/>
+          <p:cNvSpPr/>
+          <p:nvPr/>
+        </p:nvSpPr>
+        <p:spPr>
+          <a:xfrm>
+            <a:off x="1371600" y="1664208"/>
+            <a:ext cx="6492240" cy="548640"/>
           </a:xfrm>
           <a:prstGeom prst="rect">
             <a:avLst/>
@@ -4436,21 +5462,82 @@
           <a:ln/>
         </p:spPr>
         <p:txBody>
-          <a:bodyPr wrap="square" rtlCol="0" anchor="t"/>
-          <a:lstStyle/>
-          <a:p>
-            <a:pPr algn="l" marL="342900" indent="-342900">
-              <a:lnSpc>
-                <a:spcPct val="160000"/>
-              </a:lnSpc>
-              <a:spcAft>
-                <a:spcPts val="600"/>
-              </a:spcAft>
-              <a:buSzPct val="100000"/>
-              <a:buChar char="•"/>
-            </a:pPr>
-            <a:r>
-              <a:rPr lang="en-US" sz="1500" dirty="0">
+          <a:bodyPr wrap="square" lIns="0" tIns="0" rIns="0" bIns="0" rtlCol="0" anchor="ctr"/>
+          <a:lstStyle/>
+          <a:p>
+            <a:pPr indent="0" marL="0">
+              <a:buNone/>
+            </a:pPr>
+            <a:r>
+              <a:rPr lang="en-US" sz="1400" dirty="0">
+                <a:solidFill>
+                  <a:srgbClr val="2D3748"/>
+                </a:solidFill>
+                <a:latin typeface="Arial" pitchFamily="34" charset="0"/>
+                <a:ea typeface="Arial" pitchFamily="34" charset="-122"/>
+                <a:cs typeface="Arial" pitchFamily="34" charset="-120"/>
+              </a:rPr>
+              <a:t>↓  Consumenten betalen niet vrijwillig</a:t>
+            </a:r>
+            <a:endParaRPr lang="en-US" sz="1400" dirty="0"/>
+          </a:p>
+        </p:txBody>
+      </p:sp>
+      <p:sp>
+        <p:nvSpPr>
+          <p:cNvPr id="7" name="Shape 5"/>
+          <p:cNvSpPr/>
+          <p:nvPr/>
+        </p:nvSpPr>
+        <p:spPr>
+          <a:xfrm>
+            <a:off x="1188720" y="2322576"/>
+            <a:ext cx="6766560" cy="548640"/>
+          </a:xfrm>
+          <a:prstGeom prst="rect">
+            <a:avLst>
+              <a:gd name="adj" fmla="val 6667"/>
+            </a:avLst>
+          </a:prstGeom>
+          <a:solidFill>
+            <a:srgbClr val="D9534F"/>
+          </a:solidFill>
+          <a:ln/>
+          <a:effectLst>
+            <a:outerShdw sx="100000" sy="100000" kx="0" ky="0" algn="bl" rotWithShape="0" blurRad="76200" dist="25400" dir="8100000">
+              <a:srgbClr val="000000">
+                <a:alpha val="10000"/>
+              </a:srgbClr>
+            </a:outerShdw>
+          </a:effectLst>
+        </p:spPr>
+      </p:sp>
+      <p:sp>
+        <p:nvSpPr>
+          <p:cNvPr id="8" name="Text 6"/>
+          <p:cNvSpPr/>
+          <p:nvPr/>
+        </p:nvSpPr>
+        <p:spPr>
+          <a:xfrm>
+            <a:off x="1371600" y="2322576"/>
+            <a:ext cx="6492240" cy="548640"/>
+          </a:xfrm>
+          <a:prstGeom prst="rect">
+            <a:avLst/>
+          </a:prstGeom>
+          <a:noFill/>
+          <a:ln/>
+        </p:spPr>
+        <p:txBody>
+          <a:bodyPr wrap="square" lIns="0" tIns="0" rIns="0" bIns="0" rtlCol="0" anchor="ctr"/>
+          <a:lstStyle/>
+          <a:p>
+            <a:pPr indent="0" marL="0">
+              <a:buNone/>
+            </a:pPr>
+            <a:r>
+              <a:rPr lang="en-US" sz="1400" b="1" dirty="0">
                 <a:solidFill>
                   <a:srgbClr val="FFFFFF"/>
                 </a:solidFill>
@@ -4458,22 +5545,67 @@
                 <a:ea typeface="Arial" pitchFamily="34" charset="-122"/>
                 <a:cs typeface="Arial" pitchFamily="34" charset="-120"/>
               </a:rPr>
-              <a:t>Collectief goed = niet-uitsluitbaar + niet-rivaliserend</a:t>
-            </a:r>
-          </a:p>
-          <a:p>
-            <a:pPr algn="l" marL="342900" indent="-342900">
-              <a:lnSpc>
-                <a:spcPct val="160000"/>
-              </a:lnSpc>
-              <a:spcAft>
-                <a:spcPts val="600"/>
-              </a:spcAft>
-              <a:buSzPct val="100000"/>
-              <a:buChar char="•"/>
-            </a:pPr>
-            <a:r>
-              <a:rPr lang="en-US" sz="1500" dirty="0">
+              <a:t>↓  Particuliere aanbieder maakt geen winst</a:t>
+            </a:r>
+            <a:endParaRPr lang="en-US" sz="1400" dirty="0"/>
+          </a:p>
+        </p:txBody>
+      </p:sp>
+      <p:sp>
+        <p:nvSpPr>
+          <p:cNvPr id="9" name="Shape 7"/>
+          <p:cNvSpPr/>
+          <p:nvPr/>
+        </p:nvSpPr>
+        <p:spPr>
+          <a:xfrm>
+            <a:off x="1188720" y="2980944"/>
+            <a:ext cx="6766560" cy="548640"/>
+          </a:xfrm>
+          <a:prstGeom prst="rect">
+            <a:avLst>
+              <a:gd name="adj" fmla="val 6667"/>
+            </a:avLst>
+          </a:prstGeom>
+          <a:solidFill>
+            <a:srgbClr val="D9534F"/>
+          </a:solidFill>
+          <a:ln/>
+          <a:effectLst>
+            <a:outerShdw sx="100000" sy="100000" kx="0" ky="0" algn="bl" rotWithShape="0" blurRad="76200" dist="25400" dir="8100000">
+              <a:srgbClr val="000000">
+                <a:alpha val="10000"/>
+              </a:srgbClr>
+            </a:outerShdw>
+          </a:effectLst>
+        </p:spPr>
+      </p:sp>
+      <p:sp>
+        <p:nvSpPr>
+          <p:cNvPr id="10" name="Text 8"/>
+          <p:cNvSpPr/>
+          <p:nvPr/>
+        </p:nvSpPr>
+        <p:spPr>
+          <a:xfrm>
+            <a:off x="1371600" y="2980944"/>
+            <a:ext cx="6492240" cy="548640"/>
+          </a:xfrm>
+          <a:prstGeom prst="rect">
+            <a:avLst/>
+          </a:prstGeom>
+          <a:noFill/>
+          <a:ln/>
+        </p:spPr>
+        <p:txBody>
+          <a:bodyPr wrap="square" lIns="0" tIns="0" rIns="0" bIns="0" rtlCol="0" anchor="ctr"/>
+          <a:lstStyle/>
+          <a:p>
+            <a:pPr indent="0" marL="0">
+              <a:buNone/>
+            </a:pPr>
+            <a:r>
+              <a:rPr lang="en-US" sz="1400" b="1" dirty="0">
                 <a:solidFill>
                   <a:srgbClr val="FFFFFF"/>
                 </a:solidFill>
@@ -4481,77 +5613,9 @@
                 <a:ea typeface="Arial" pitchFamily="34" charset="-122"/>
                 <a:cs typeface="Arial" pitchFamily="34" charset="-120"/>
               </a:rPr>
-              <a:t>Particuliere aanbieder kan er geen winst mee maken</a:t>
-            </a:r>
-          </a:p>
-          <a:p>
-            <a:pPr algn="l" marL="342900" indent="-342900">
-              <a:lnSpc>
-                <a:spcPct val="160000"/>
-              </a:lnSpc>
-              <a:spcAft>
-                <a:spcPts val="600"/>
-              </a:spcAft>
-              <a:buSzPct val="100000"/>
-              <a:buChar char="•"/>
-            </a:pPr>
-            <a:r>
-              <a:rPr lang="en-US" sz="1500" dirty="0">
-                <a:solidFill>
-                  <a:srgbClr val="FFFFFF"/>
-                </a:solidFill>
-                <a:latin typeface="Arial" pitchFamily="34" charset="0"/>
-                <a:ea typeface="Arial" pitchFamily="34" charset="-122"/>
-                <a:cs typeface="Arial" pitchFamily="34" charset="-120"/>
-              </a:rPr>
-              <a:t>Meeliftgedrag: niemand wil als enige betalen</a:t>
-            </a:r>
-          </a:p>
-          <a:p>
-            <a:pPr algn="l" marL="342900" indent="-342900">
-              <a:lnSpc>
-                <a:spcPct val="160000"/>
-              </a:lnSpc>
-              <a:spcAft>
-                <a:spcPts val="600"/>
-              </a:spcAft>
-              <a:buSzPct val="100000"/>
-              <a:buChar char="•"/>
-            </a:pPr>
-            <a:r>
-              <a:rPr lang="en-US" sz="1500" dirty="0">
-                <a:solidFill>
-                  <a:srgbClr val="FFFFFF"/>
-                </a:solidFill>
-                <a:latin typeface="Arial" pitchFamily="34" charset="0"/>
-                <a:ea typeface="Arial" pitchFamily="34" charset="-122"/>
-                <a:cs typeface="Arial" pitchFamily="34" charset="-120"/>
-              </a:rPr>
-              <a:t>De overheid biedt collectieve goederen aan</a:t>
-            </a:r>
-          </a:p>
-          <a:p>
-            <a:pPr algn="l" marL="342900" indent="-342900">
-              <a:lnSpc>
-                <a:spcPct val="160000"/>
-              </a:lnSpc>
-              <a:spcAft>
-                <a:spcPts val="600"/>
-              </a:spcAft>
-              <a:buSzPct val="100000"/>
-              <a:buChar char="•"/>
-            </a:pPr>
-            <a:r>
-              <a:rPr lang="en-US" sz="1500" dirty="0">
-                <a:solidFill>
-                  <a:srgbClr val="FFFFFF"/>
-                </a:solidFill>
-                <a:latin typeface="Arial" pitchFamily="34" charset="0"/>
-                <a:ea typeface="Arial" pitchFamily="34" charset="-122"/>
-                <a:cs typeface="Arial" pitchFamily="34" charset="-120"/>
-              </a:rPr>
-              <a:t>Betaling gaat via verplichte belastingheffing</a:t>
-            </a:r>
+              <a:t>↓  Markt levert het goed niet — welvaartsverlies</a:t>
+            </a:r>
+            <a:endParaRPr lang="en-US" sz="1400" dirty="0"/>
           </a:p>
         </p:txBody>
       </p:sp>
